--- a/恩典的記號.pptx
+++ b/恩典的記號.pptx
@@ -5,12 +5,17 @@
     <p:sldMasterId id="2147483672" r:id="rId1"/>
   </p:sldMasterIdLst>
   <p:sldIdLst>
-    <p:sldId id="256" r:id="rId2"/>
-    <p:sldId id="257" r:id="rId3"/>
-    <p:sldId id="258" r:id="rId4"/>
-    <p:sldId id="259" r:id="rId5"/>
-    <p:sldId id="260" r:id="rId6"/>
-    <p:sldId id="261" r:id="rId7"/>
+    <p:sldId id="591" r:id="rId2"/>
+    <p:sldId id="592" r:id="rId3"/>
+    <p:sldId id="593" r:id="rId4"/>
+    <p:sldId id="594" r:id="rId5"/>
+    <p:sldId id="595" r:id="rId6"/>
+    <p:sldId id="596" r:id="rId7"/>
+    <p:sldId id="597" r:id="rId8"/>
+    <p:sldId id="598" r:id="rId9"/>
+    <p:sldId id="599" r:id="rId10"/>
+    <p:sldId id="600" r:id="rId11"/>
+    <p:sldId id="601" r:id="rId12"/>
   </p:sldIdLst>
   <p:sldSz cx="9144000" cy="5143500" type="screen16x9"/>
   <p:notesSz cx="6858000" cy="9144000"/>
@@ -109,6 +114,22 @@
       </a:defRPr>
     </a:lvl9pPr>
   </p:defaultTextStyle>
+  <p:extLst>
+    <p:ext uri="{EFAFB233-063F-42B5-8137-9DF3F51BA10A}">
+      <p15:sldGuideLst xmlns:p15="http://schemas.microsoft.com/office/powerpoint/2012/main">
+        <p15:guide id="1" orient="horz" pos="1620">
+          <p15:clr>
+            <a:srgbClr val="A4A3A4"/>
+          </p15:clr>
+        </p15:guide>
+        <p15:guide id="2" pos="2880">
+          <p15:clr>
+            <a:srgbClr val="A4A3A4"/>
+          </p15:clr>
+        </p15:guide>
+      </p15:sldGuideLst>
+    </p:ext>
+  </p:extLst>
 </p:presentation>
 </file>
 
@@ -150,10 +171,9 @@
           <a:lstStyle/>
           <a:p>
             <a:r>
-              <a:rPr lang="zh-TW" altLang="en-US" smtClean="0"/>
+              <a:rPr lang="zh-TW" altLang="en-US"/>
               <a:t>按一下以編輯母片標題樣式</a:t>
             </a:r>
-            <a:endParaRPr lang="zh-TW" altLang="en-US"/>
           </a:p>
         </p:txBody>
       </p:sp>
@@ -269,10 +289,9 @@
           </a:lstStyle>
           <a:p>
             <a:r>
-              <a:rPr lang="zh-TW" altLang="en-US" smtClean="0"/>
+              <a:rPr lang="zh-TW" altLang="en-US"/>
               <a:t>按一下以編輯母片副標題樣式</a:t>
             </a:r>
-            <a:endParaRPr lang="zh-TW" altLang="en-US"/>
           </a:p>
         </p:txBody>
       </p:sp>
@@ -294,7 +313,7 @@
             <a:fld id="{0B84EEE5-0269-41C3-8BE4-0D0823A29EA8}" type="datetimeFigureOut">
               <a:rPr lang="zh-TW" altLang="en-US" smtClean="0"/>
               <a:pPr/>
-              <a:t>2019/10/10</a:t>
+              <a:t>2024/11/2</a:t>
             </a:fld>
             <a:endParaRPr lang="zh-TW" altLang="en-US"/>
           </a:p>
@@ -384,10 +403,9 @@
           <a:lstStyle/>
           <a:p>
             <a:r>
-              <a:rPr lang="zh-TW" altLang="en-US" smtClean="0"/>
+              <a:rPr lang="zh-TW" altLang="en-US"/>
               <a:t>按一下以編輯母片標題樣式</a:t>
             </a:r>
-            <a:endParaRPr lang="zh-TW" altLang="en-US"/>
           </a:p>
         </p:txBody>
       </p:sp>
@@ -408,38 +426,37 @@
           <a:p>
             <a:pPr lvl="0"/>
             <a:r>
-              <a:rPr lang="zh-TW" altLang="en-US" smtClean="0"/>
+              <a:rPr lang="zh-TW" altLang="en-US"/>
               <a:t>按一下以編輯母片文字樣式</a:t>
             </a:r>
           </a:p>
           <a:p>
             <a:pPr lvl="1"/>
             <a:r>
-              <a:rPr lang="zh-TW" altLang="en-US" smtClean="0"/>
+              <a:rPr lang="zh-TW" altLang="en-US"/>
               <a:t>第二層</a:t>
             </a:r>
           </a:p>
           <a:p>
             <a:pPr lvl="2"/>
             <a:r>
-              <a:rPr lang="zh-TW" altLang="en-US" smtClean="0"/>
+              <a:rPr lang="zh-TW" altLang="en-US"/>
               <a:t>第三層</a:t>
             </a:r>
           </a:p>
           <a:p>
             <a:pPr lvl="3"/>
             <a:r>
-              <a:rPr lang="zh-TW" altLang="en-US" smtClean="0"/>
+              <a:rPr lang="zh-TW" altLang="en-US"/>
               <a:t>第四層</a:t>
             </a:r>
           </a:p>
           <a:p>
             <a:pPr lvl="4"/>
             <a:r>
-              <a:rPr lang="zh-TW" altLang="en-US" smtClean="0"/>
+              <a:rPr lang="zh-TW" altLang="en-US"/>
               <a:t>第五層</a:t>
             </a:r>
-            <a:endParaRPr lang="zh-TW" altLang="en-US"/>
           </a:p>
         </p:txBody>
       </p:sp>
@@ -461,7 +478,7 @@
             <a:fld id="{0B84EEE5-0269-41C3-8BE4-0D0823A29EA8}" type="datetimeFigureOut">
               <a:rPr lang="zh-TW" altLang="en-US" smtClean="0"/>
               <a:pPr/>
-              <a:t>2019/10/10</a:t>
+              <a:t>2024/11/2</a:t>
             </a:fld>
             <a:endParaRPr lang="zh-TW" altLang="en-US"/>
           </a:p>
@@ -556,10 +573,9 @@
           <a:lstStyle/>
           <a:p>
             <a:r>
-              <a:rPr lang="zh-TW" altLang="en-US" smtClean="0"/>
+              <a:rPr lang="zh-TW" altLang="en-US"/>
               <a:t>按一下以編輯母片標題樣式</a:t>
             </a:r>
-            <a:endParaRPr lang="zh-TW" altLang="en-US"/>
           </a:p>
         </p:txBody>
       </p:sp>
@@ -585,38 +601,37 @@
           <a:p>
             <a:pPr lvl="0"/>
             <a:r>
-              <a:rPr lang="zh-TW" altLang="en-US" smtClean="0"/>
+              <a:rPr lang="zh-TW" altLang="en-US"/>
               <a:t>按一下以編輯母片文字樣式</a:t>
             </a:r>
           </a:p>
           <a:p>
             <a:pPr lvl="1"/>
             <a:r>
-              <a:rPr lang="zh-TW" altLang="en-US" smtClean="0"/>
+              <a:rPr lang="zh-TW" altLang="en-US"/>
               <a:t>第二層</a:t>
             </a:r>
           </a:p>
           <a:p>
             <a:pPr lvl="2"/>
             <a:r>
-              <a:rPr lang="zh-TW" altLang="en-US" smtClean="0"/>
+              <a:rPr lang="zh-TW" altLang="en-US"/>
               <a:t>第三層</a:t>
             </a:r>
           </a:p>
           <a:p>
             <a:pPr lvl="3"/>
             <a:r>
-              <a:rPr lang="zh-TW" altLang="en-US" smtClean="0"/>
+              <a:rPr lang="zh-TW" altLang="en-US"/>
               <a:t>第四層</a:t>
             </a:r>
           </a:p>
           <a:p>
             <a:pPr lvl="4"/>
             <a:r>
-              <a:rPr lang="zh-TW" altLang="en-US" smtClean="0"/>
+              <a:rPr lang="zh-TW" altLang="en-US"/>
               <a:t>第五層</a:t>
             </a:r>
-            <a:endParaRPr lang="zh-TW" altLang="en-US"/>
           </a:p>
         </p:txBody>
       </p:sp>
@@ -638,7 +653,7 @@
             <a:fld id="{0B84EEE5-0269-41C3-8BE4-0D0823A29EA8}" type="datetimeFigureOut">
               <a:rPr lang="zh-TW" altLang="en-US" smtClean="0"/>
               <a:pPr/>
-              <a:t>2019/10/10</a:t>
+              <a:t>2024/11/2</a:t>
             </a:fld>
             <a:endParaRPr lang="zh-TW" altLang="en-US"/>
           </a:p>
@@ -728,10 +743,9 @@
           <a:lstStyle/>
           <a:p>
             <a:r>
-              <a:rPr lang="zh-TW" altLang="en-US" smtClean="0"/>
+              <a:rPr lang="zh-TW" altLang="en-US"/>
               <a:t>按一下以編輯母片標題樣式</a:t>
             </a:r>
-            <a:endParaRPr lang="zh-TW" altLang="en-US"/>
           </a:p>
         </p:txBody>
       </p:sp>
@@ -752,38 +766,37 @@
           <a:p>
             <a:pPr lvl="0"/>
             <a:r>
-              <a:rPr lang="zh-TW" altLang="en-US" smtClean="0"/>
+              <a:rPr lang="zh-TW" altLang="en-US"/>
               <a:t>按一下以編輯母片文字樣式</a:t>
             </a:r>
           </a:p>
           <a:p>
             <a:pPr lvl="1"/>
             <a:r>
-              <a:rPr lang="zh-TW" altLang="en-US" smtClean="0"/>
+              <a:rPr lang="zh-TW" altLang="en-US"/>
               <a:t>第二層</a:t>
             </a:r>
           </a:p>
           <a:p>
             <a:pPr lvl="2"/>
             <a:r>
-              <a:rPr lang="zh-TW" altLang="en-US" smtClean="0"/>
+              <a:rPr lang="zh-TW" altLang="en-US"/>
               <a:t>第三層</a:t>
             </a:r>
           </a:p>
           <a:p>
             <a:pPr lvl="3"/>
             <a:r>
-              <a:rPr lang="zh-TW" altLang="en-US" smtClean="0"/>
+              <a:rPr lang="zh-TW" altLang="en-US"/>
               <a:t>第四層</a:t>
             </a:r>
           </a:p>
           <a:p>
             <a:pPr lvl="4"/>
             <a:r>
-              <a:rPr lang="zh-TW" altLang="en-US" smtClean="0"/>
+              <a:rPr lang="zh-TW" altLang="en-US"/>
               <a:t>第五層</a:t>
             </a:r>
-            <a:endParaRPr lang="zh-TW" altLang="en-US"/>
           </a:p>
         </p:txBody>
       </p:sp>
@@ -805,7 +818,7 @@
             <a:fld id="{0B84EEE5-0269-41C3-8BE4-0D0823A29EA8}" type="datetimeFigureOut">
               <a:rPr lang="zh-TW" altLang="en-US" smtClean="0"/>
               <a:pPr/>
-              <a:t>2019/10/10</a:t>
+              <a:t>2024/11/2</a:t>
             </a:fld>
             <a:endParaRPr lang="zh-TW" altLang="en-US"/>
           </a:p>
@@ -904,10 +917,9 @@
           </a:lstStyle>
           <a:p>
             <a:r>
-              <a:rPr lang="zh-TW" altLang="en-US" smtClean="0"/>
+              <a:rPr lang="zh-TW" altLang="en-US"/>
               <a:t>按一下以編輯母片標題樣式</a:t>
             </a:r>
-            <a:endParaRPr lang="zh-TW" altLang="en-US"/>
           </a:p>
         </p:txBody>
       </p:sp>
@@ -1024,7 +1036,7 @@
           <a:p>
             <a:pPr lvl="0"/>
             <a:r>
-              <a:rPr lang="zh-TW" altLang="en-US" smtClean="0"/>
+              <a:rPr lang="zh-TW" altLang="en-US"/>
               <a:t>按一下以編輯母片文字樣式</a:t>
             </a:r>
           </a:p>
@@ -1048,7 +1060,7 @@
             <a:fld id="{0B84EEE5-0269-41C3-8BE4-0D0823A29EA8}" type="datetimeFigureOut">
               <a:rPr lang="zh-TW" altLang="en-US" smtClean="0"/>
               <a:pPr/>
-              <a:t>2019/10/10</a:t>
+              <a:t>2024/11/2</a:t>
             </a:fld>
             <a:endParaRPr lang="zh-TW" altLang="en-US"/>
           </a:p>
@@ -1138,10 +1150,9 @@
           <a:lstStyle/>
           <a:p>
             <a:r>
-              <a:rPr lang="zh-TW" altLang="en-US" smtClean="0"/>
+              <a:rPr lang="zh-TW" altLang="en-US"/>
               <a:t>按一下以編輯母片標題樣式</a:t>
             </a:r>
-            <a:endParaRPr lang="zh-TW" altLang="en-US"/>
           </a:p>
         </p:txBody>
       </p:sp>
@@ -1195,38 +1206,37 @@
           <a:p>
             <a:pPr lvl="0"/>
             <a:r>
-              <a:rPr lang="zh-TW" altLang="en-US" smtClean="0"/>
+              <a:rPr lang="zh-TW" altLang="en-US"/>
               <a:t>按一下以編輯母片文字樣式</a:t>
             </a:r>
           </a:p>
           <a:p>
             <a:pPr lvl="1"/>
             <a:r>
-              <a:rPr lang="zh-TW" altLang="en-US" smtClean="0"/>
+              <a:rPr lang="zh-TW" altLang="en-US"/>
               <a:t>第二層</a:t>
             </a:r>
           </a:p>
           <a:p>
             <a:pPr lvl="2"/>
             <a:r>
-              <a:rPr lang="zh-TW" altLang="en-US" smtClean="0"/>
+              <a:rPr lang="zh-TW" altLang="en-US"/>
               <a:t>第三層</a:t>
             </a:r>
           </a:p>
           <a:p>
             <a:pPr lvl="3"/>
             <a:r>
-              <a:rPr lang="zh-TW" altLang="en-US" smtClean="0"/>
+              <a:rPr lang="zh-TW" altLang="en-US"/>
               <a:t>第四層</a:t>
             </a:r>
           </a:p>
           <a:p>
             <a:pPr lvl="4"/>
             <a:r>
-              <a:rPr lang="zh-TW" altLang="en-US" smtClean="0"/>
+              <a:rPr lang="zh-TW" altLang="en-US"/>
               <a:t>第五層</a:t>
             </a:r>
-            <a:endParaRPr lang="zh-TW" altLang="en-US"/>
           </a:p>
         </p:txBody>
       </p:sp>
@@ -1280,38 +1290,37 @@
           <a:p>
             <a:pPr lvl="0"/>
             <a:r>
-              <a:rPr lang="zh-TW" altLang="en-US" smtClean="0"/>
+              <a:rPr lang="zh-TW" altLang="en-US"/>
               <a:t>按一下以編輯母片文字樣式</a:t>
             </a:r>
           </a:p>
           <a:p>
             <a:pPr lvl="1"/>
             <a:r>
-              <a:rPr lang="zh-TW" altLang="en-US" smtClean="0"/>
+              <a:rPr lang="zh-TW" altLang="en-US"/>
               <a:t>第二層</a:t>
             </a:r>
           </a:p>
           <a:p>
             <a:pPr lvl="2"/>
             <a:r>
-              <a:rPr lang="zh-TW" altLang="en-US" smtClean="0"/>
+              <a:rPr lang="zh-TW" altLang="en-US"/>
               <a:t>第三層</a:t>
             </a:r>
           </a:p>
           <a:p>
             <a:pPr lvl="3"/>
             <a:r>
-              <a:rPr lang="zh-TW" altLang="en-US" smtClean="0"/>
+              <a:rPr lang="zh-TW" altLang="en-US"/>
               <a:t>第四層</a:t>
             </a:r>
           </a:p>
           <a:p>
             <a:pPr lvl="4"/>
             <a:r>
-              <a:rPr lang="zh-TW" altLang="en-US" smtClean="0"/>
+              <a:rPr lang="zh-TW" altLang="en-US"/>
               <a:t>第五層</a:t>
             </a:r>
-            <a:endParaRPr lang="zh-TW" altLang="en-US"/>
           </a:p>
         </p:txBody>
       </p:sp>
@@ -1333,7 +1342,7 @@
             <a:fld id="{0B84EEE5-0269-41C3-8BE4-0D0823A29EA8}" type="datetimeFigureOut">
               <a:rPr lang="zh-TW" altLang="en-US" smtClean="0"/>
               <a:pPr/>
-              <a:t>2019/10/10</a:t>
+              <a:t>2024/11/2</a:t>
             </a:fld>
             <a:endParaRPr lang="zh-TW" altLang="en-US"/>
           </a:p>
@@ -1427,10 +1436,9 @@
           </a:lstStyle>
           <a:p>
             <a:r>
-              <a:rPr lang="zh-TW" altLang="en-US" smtClean="0"/>
+              <a:rPr lang="zh-TW" altLang="en-US"/>
               <a:t>按一下以編輯母片標題樣式</a:t>
             </a:r>
-            <a:endParaRPr lang="zh-TW" altLang="en-US"/>
           </a:p>
         </p:txBody>
       </p:sp>
@@ -1493,7 +1501,7 @@
           <a:p>
             <a:pPr lvl="0"/>
             <a:r>
-              <a:rPr lang="zh-TW" altLang="en-US" smtClean="0"/>
+              <a:rPr lang="zh-TW" altLang="en-US"/>
               <a:t>按一下以編輯母片文字樣式</a:t>
             </a:r>
           </a:p>
@@ -1549,38 +1557,37 @@
           <a:p>
             <a:pPr lvl="0"/>
             <a:r>
-              <a:rPr lang="zh-TW" altLang="en-US" smtClean="0"/>
+              <a:rPr lang="zh-TW" altLang="en-US"/>
               <a:t>按一下以編輯母片文字樣式</a:t>
             </a:r>
           </a:p>
           <a:p>
             <a:pPr lvl="1"/>
             <a:r>
-              <a:rPr lang="zh-TW" altLang="en-US" smtClean="0"/>
+              <a:rPr lang="zh-TW" altLang="en-US"/>
               <a:t>第二層</a:t>
             </a:r>
           </a:p>
           <a:p>
             <a:pPr lvl="2"/>
             <a:r>
-              <a:rPr lang="zh-TW" altLang="en-US" smtClean="0"/>
+              <a:rPr lang="zh-TW" altLang="en-US"/>
               <a:t>第三層</a:t>
             </a:r>
           </a:p>
           <a:p>
             <a:pPr lvl="3"/>
             <a:r>
-              <a:rPr lang="zh-TW" altLang="en-US" smtClean="0"/>
+              <a:rPr lang="zh-TW" altLang="en-US"/>
               <a:t>第四層</a:t>
             </a:r>
           </a:p>
           <a:p>
             <a:pPr lvl="4"/>
             <a:r>
-              <a:rPr lang="zh-TW" altLang="en-US" smtClean="0"/>
+              <a:rPr lang="zh-TW" altLang="en-US"/>
               <a:t>第五層</a:t>
             </a:r>
-            <a:endParaRPr lang="zh-TW" altLang="en-US"/>
           </a:p>
         </p:txBody>
       </p:sp>
@@ -1643,7 +1650,7 @@
           <a:p>
             <a:pPr lvl="0"/>
             <a:r>
-              <a:rPr lang="zh-TW" altLang="en-US" smtClean="0"/>
+              <a:rPr lang="zh-TW" altLang="en-US"/>
               <a:t>按一下以編輯母片文字樣式</a:t>
             </a:r>
           </a:p>
@@ -1699,38 +1706,37 @@
           <a:p>
             <a:pPr lvl="0"/>
             <a:r>
-              <a:rPr lang="zh-TW" altLang="en-US" smtClean="0"/>
+              <a:rPr lang="zh-TW" altLang="en-US"/>
               <a:t>按一下以編輯母片文字樣式</a:t>
             </a:r>
           </a:p>
           <a:p>
             <a:pPr lvl="1"/>
             <a:r>
-              <a:rPr lang="zh-TW" altLang="en-US" smtClean="0"/>
+              <a:rPr lang="zh-TW" altLang="en-US"/>
               <a:t>第二層</a:t>
             </a:r>
           </a:p>
           <a:p>
             <a:pPr lvl="2"/>
             <a:r>
-              <a:rPr lang="zh-TW" altLang="en-US" smtClean="0"/>
+              <a:rPr lang="zh-TW" altLang="en-US"/>
               <a:t>第三層</a:t>
             </a:r>
           </a:p>
           <a:p>
             <a:pPr lvl="3"/>
             <a:r>
-              <a:rPr lang="zh-TW" altLang="en-US" smtClean="0"/>
+              <a:rPr lang="zh-TW" altLang="en-US"/>
               <a:t>第四層</a:t>
             </a:r>
           </a:p>
           <a:p>
             <a:pPr lvl="4"/>
             <a:r>
-              <a:rPr lang="zh-TW" altLang="en-US" smtClean="0"/>
+              <a:rPr lang="zh-TW" altLang="en-US"/>
               <a:t>第五層</a:t>
             </a:r>
-            <a:endParaRPr lang="zh-TW" altLang="en-US"/>
           </a:p>
         </p:txBody>
       </p:sp>
@@ -1752,7 +1758,7 @@
             <a:fld id="{0B84EEE5-0269-41C3-8BE4-0D0823A29EA8}" type="datetimeFigureOut">
               <a:rPr lang="zh-TW" altLang="en-US" smtClean="0"/>
               <a:pPr/>
-              <a:t>2019/10/10</a:t>
+              <a:t>2024/11/2</a:t>
             </a:fld>
             <a:endParaRPr lang="zh-TW" altLang="en-US"/>
           </a:p>
@@ -1842,10 +1848,9 @@
           <a:lstStyle/>
           <a:p>
             <a:r>
-              <a:rPr lang="zh-TW" altLang="en-US" smtClean="0"/>
+              <a:rPr lang="zh-TW" altLang="en-US"/>
               <a:t>按一下以編輯母片標題樣式</a:t>
             </a:r>
-            <a:endParaRPr lang="zh-TW" altLang="en-US"/>
           </a:p>
         </p:txBody>
       </p:sp>
@@ -1867,7 +1872,7 @@
             <a:fld id="{0B84EEE5-0269-41C3-8BE4-0D0823A29EA8}" type="datetimeFigureOut">
               <a:rPr lang="zh-TW" altLang="en-US" smtClean="0"/>
               <a:pPr/>
-              <a:t>2019/10/10</a:t>
+              <a:t>2024/11/2</a:t>
             </a:fld>
             <a:endParaRPr lang="zh-TW" altLang="en-US"/>
           </a:p>
@@ -1959,7 +1964,7 @@
             <a:fld id="{0B84EEE5-0269-41C3-8BE4-0D0823A29EA8}" type="datetimeFigureOut">
               <a:rPr lang="zh-TW" altLang="en-US" smtClean="0"/>
               <a:pPr/>
-              <a:t>2019/10/10</a:t>
+              <a:t>2024/11/2</a:t>
             </a:fld>
             <a:endParaRPr lang="zh-TW" altLang="en-US"/>
           </a:p>
@@ -2058,10 +2063,9 @@
           </a:lstStyle>
           <a:p>
             <a:r>
-              <a:rPr lang="zh-TW" altLang="en-US" smtClean="0"/>
+              <a:rPr lang="zh-TW" altLang="en-US"/>
               <a:t>按一下以編輯母片標題樣式</a:t>
             </a:r>
-            <a:endParaRPr lang="zh-TW" altLang="en-US"/>
           </a:p>
         </p:txBody>
       </p:sp>
@@ -2115,38 +2119,37 @@
           <a:p>
             <a:pPr lvl="0"/>
             <a:r>
-              <a:rPr lang="zh-TW" altLang="en-US" smtClean="0"/>
+              <a:rPr lang="zh-TW" altLang="en-US"/>
               <a:t>按一下以編輯母片文字樣式</a:t>
             </a:r>
           </a:p>
           <a:p>
             <a:pPr lvl="1"/>
             <a:r>
-              <a:rPr lang="zh-TW" altLang="en-US" smtClean="0"/>
+              <a:rPr lang="zh-TW" altLang="en-US"/>
               <a:t>第二層</a:t>
             </a:r>
           </a:p>
           <a:p>
             <a:pPr lvl="2"/>
             <a:r>
-              <a:rPr lang="zh-TW" altLang="en-US" smtClean="0"/>
+              <a:rPr lang="zh-TW" altLang="en-US"/>
               <a:t>第三層</a:t>
             </a:r>
           </a:p>
           <a:p>
             <a:pPr lvl="3"/>
             <a:r>
-              <a:rPr lang="zh-TW" altLang="en-US" smtClean="0"/>
+              <a:rPr lang="zh-TW" altLang="en-US"/>
               <a:t>第四層</a:t>
             </a:r>
           </a:p>
           <a:p>
             <a:pPr lvl="4"/>
             <a:r>
-              <a:rPr lang="zh-TW" altLang="en-US" smtClean="0"/>
+              <a:rPr lang="zh-TW" altLang="en-US"/>
               <a:t>第五層</a:t>
             </a:r>
-            <a:endParaRPr lang="zh-TW" altLang="en-US"/>
           </a:p>
         </p:txBody>
       </p:sp>
@@ -2209,7 +2212,7 @@
           <a:p>
             <a:pPr lvl="0"/>
             <a:r>
-              <a:rPr lang="zh-TW" altLang="en-US" smtClean="0"/>
+              <a:rPr lang="zh-TW" altLang="en-US"/>
               <a:t>按一下以編輯母片文字樣式</a:t>
             </a:r>
           </a:p>
@@ -2233,7 +2236,7 @@
             <a:fld id="{0B84EEE5-0269-41C3-8BE4-0D0823A29EA8}" type="datetimeFigureOut">
               <a:rPr lang="zh-TW" altLang="en-US" smtClean="0"/>
               <a:pPr/>
-              <a:t>2019/10/10</a:t>
+              <a:t>2024/11/2</a:t>
             </a:fld>
             <a:endParaRPr lang="zh-TW" altLang="en-US"/>
           </a:p>
@@ -2332,10 +2335,9 @@
           </a:lstStyle>
           <a:p>
             <a:r>
-              <a:rPr lang="zh-TW" altLang="en-US" smtClean="0"/>
+              <a:rPr lang="zh-TW" altLang="en-US"/>
               <a:t>按一下以編輯母片標題樣式</a:t>
             </a:r>
-            <a:endParaRPr lang="zh-TW" altLang="en-US"/>
           </a:p>
         </p:txBody>
       </p:sp>
@@ -2397,10 +2399,9 @@
           </a:lstStyle>
           <a:p>
             <a:r>
-              <a:rPr lang="zh-TW" altLang="en-US" smtClean="0"/>
+              <a:rPr lang="zh-TW" altLang="en-US"/>
               <a:t>按一下圖示以新增圖片</a:t>
             </a:r>
-            <a:endParaRPr lang="zh-TW" altLang="en-US"/>
           </a:p>
         </p:txBody>
       </p:sp>
@@ -2463,7 +2464,7 @@
           <a:p>
             <a:pPr lvl="0"/>
             <a:r>
-              <a:rPr lang="zh-TW" altLang="en-US" smtClean="0"/>
+              <a:rPr lang="zh-TW" altLang="en-US"/>
               <a:t>按一下以編輯母片文字樣式</a:t>
             </a:r>
           </a:p>
@@ -2487,7 +2488,7 @@
             <a:fld id="{0B84EEE5-0269-41C3-8BE4-0D0823A29EA8}" type="datetimeFigureOut">
               <a:rPr lang="zh-TW" altLang="en-US" smtClean="0"/>
               <a:pPr/>
-              <a:t>2019/10/10</a:t>
+              <a:t>2024/11/2</a:t>
             </a:fld>
             <a:endParaRPr lang="zh-TW" altLang="en-US"/>
           </a:p>
@@ -2597,10 +2598,9 @@
           <a:lstStyle/>
           <a:p>
             <a:r>
-              <a:rPr lang="zh-TW" altLang="en-US" smtClean="0"/>
+              <a:rPr lang="zh-TW" altLang="en-US"/>
               <a:t>按一下以編輯母片標題樣式</a:t>
             </a:r>
-            <a:endParaRPr lang="zh-TW" altLang="en-US"/>
           </a:p>
         </p:txBody>
       </p:sp>
@@ -2631,38 +2631,37 @@
           <a:p>
             <a:pPr lvl="0"/>
             <a:r>
-              <a:rPr lang="zh-TW" altLang="en-US" smtClean="0"/>
+              <a:rPr lang="zh-TW" altLang="en-US"/>
               <a:t>按一下以編輯母片文字樣式</a:t>
             </a:r>
           </a:p>
           <a:p>
             <a:pPr lvl="1"/>
             <a:r>
-              <a:rPr lang="zh-TW" altLang="en-US" smtClean="0"/>
+              <a:rPr lang="zh-TW" altLang="en-US"/>
               <a:t>第二層</a:t>
             </a:r>
           </a:p>
           <a:p>
             <a:pPr lvl="2"/>
             <a:r>
-              <a:rPr lang="zh-TW" altLang="en-US" smtClean="0"/>
+              <a:rPr lang="zh-TW" altLang="en-US"/>
               <a:t>第三層</a:t>
             </a:r>
           </a:p>
           <a:p>
             <a:pPr lvl="3"/>
             <a:r>
-              <a:rPr lang="zh-TW" altLang="en-US" smtClean="0"/>
+              <a:rPr lang="zh-TW" altLang="en-US"/>
               <a:t>第四層</a:t>
             </a:r>
           </a:p>
           <a:p>
             <a:pPr lvl="4"/>
             <a:r>
-              <a:rPr lang="zh-TW" altLang="en-US" smtClean="0"/>
+              <a:rPr lang="zh-TW" altLang="en-US"/>
               <a:t>第五層</a:t>
             </a:r>
-            <a:endParaRPr lang="zh-TW" altLang="en-US"/>
           </a:p>
         </p:txBody>
       </p:sp>
@@ -2702,7 +2701,7 @@
             <a:fld id="{0B84EEE5-0269-41C3-8BE4-0D0823A29EA8}" type="datetimeFigureOut">
               <a:rPr lang="zh-TW" altLang="en-US" smtClean="0"/>
               <a:pPr/>
-              <a:t>2019/10/10</a:t>
+              <a:t>2024/11/2</a:t>
             </a:fld>
             <a:endParaRPr lang="zh-TW" altLang="en-US"/>
           </a:p>
@@ -3083,24 +3082,126 @@
             <p:ph type="title"/>
           </p:nvPr>
         </p:nvSpPr>
-        <p:spPr/>
+        <p:spPr>
+          <a:xfrm>
+            <a:off x="0" y="1995686"/>
+            <a:ext cx="9144000" cy="857250"/>
+          </a:xfrm>
+        </p:spPr>
         <p:txBody>
           <a:bodyPr>
+            <a:noAutofit/>
+          </a:bodyPr>
+          <a:lstStyle/>
+          <a:p>
+            <a:r>
+              <a:rPr lang="zh-TW" altLang="en-US" sz="5400" b="1" i="1" dirty="0">
+                <a:solidFill>
+                  <a:srgbClr val="660033"/>
+                </a:solidFill>
+                <a:effectLst>
+                  <a:outerShdw blurRad="38100" dist="38100" dir="2700000" algn="tl">
+                    <a:srgbClr val="000000">
+                      <a:alpha val="43137"/>
+                    </a:srgbClr>
+                  </a:outerShdw>
+                </a:effectLst>
+                <a:latin typeface="微軟正黑體" pitchFamily="34" charset="-120"/>
+                <a:ea typeface="微軟正黑體" pitchFamily="34" charset="-120"/>
+              </a:rPr>
+              <a:t>恩典的記號</a:t>
+            </a:r>
+          </a:p>
+        </p:txBody>
+      </p:sp>
+    </p:spTree>
+  </p:cSld>
+  <p:clrMapOvr>
+    <a:masterClrMapping/>
+  </p:clrMapOvr>
+</p:sld>
+</file>
+
+<file path=ppt/slides/slide10.xml><?xml version="1.0" encoding="utf-8"?>
+<p:sld xmlns:a="http://schemas.openxmlformats.org/drawingml/2006/main" xmlns:r="http://schemas.openxmlformats.org/officeDocument/2006/relationships" xmlns:p="http://schemas.openxmlformats.org/presentationml/2006/main">
+  <p:cSld>
+    <p:spTree>
+      <p:nvGrpSpPr>
+        <p:cNvPr id="1" name="">
+          <a:extLst>
+            <a:ext uri="{FF2B5EF4-FFF2-40B4-BE49-F238E27FC236}">
+              <a16:creationId xmlns:a16="http://schemas.microsoft.com/office/drawing/2014/main" id="{312F7B3A-E13F-683A-3106-7CB06F56A398}"/>
+            </a:ext>
+          </a:extLst>
+        </p:cNvPr>
+        <p:cNvGrpSpPr/>
+        <p:nvPr/>
+      </p:nvGrpSpPr>
+      <p:grpSpPr>
+        <a:xfrm>
+          <a:off x="0" y="0"/>
+          <a:ext cx="0" cy="0"/>
+          <a:chOff x="0" y="0"/>
+          <a:chExt cx="0" cy="0"/>
+        </a:xfrm>
+      </p:grpSpPr>
+      <p:sp>
+        <p:nvSpPr>
+          <p:cNvPr id="5" name="內容版面配置區 4">
+            <a:extLst>
+              <a:ext uri="{FF2B5EF4-FFF2-40B4-BE49-F238E27FC236}">
+                <a16:creationId xmlns:a16="http://schemas.microsoft.com/office/drawing/2014/main" id="{B842EDB6-406D-D830-4442-7C0A0CE6FB36}"/>
+              </a:ext>
+            </a:extLst>
+          </p:cNvPr>
+          <p:cNvSpPr>
+            <a:spLocks noGrp="1"/>
+          </p:cNvSpPr>
+          <p:nvPr>
+            <p:ph idx="1"/>
+          </p:nvPr>
+        </p:nvSpPr>
+        <p:spPr>
+          <a:xfrm>
+            <a:off x="0" y="1563638"/>
+            <a:ext cx="9144000" cy="1803647"/>
+          </a:xfrm>
+        </p:spPr>
+        <p:txBody>
+          <a:bodyPr anchor="ctr">
             <a:normAutofit/>
           </a:bodyPr>
           <a:lstStyle/>
           <a:p>
-            <a:r>
-              <a:rPr lang="zh-TW" altLang="en-US" sz="4000" b="1" dirty="0" smtClean="0">
+            <a:pPr algn="ctr">
+              <a:buNone/>
+            </a:pPr>
+            <a:r>
+              <a:rPr lang="zh-TW" altLang="en-US" sz="4800" b="1" dirty="0">
                 <a:solidFill>
                   <a:srgbClr val="660033"/>
                 </a:solidFill>
                 <a:latin typeface="微軟正黑體" pitchFamily="34" charset="-120"/>
                 <a:ea typeface="微軟正黑體" pitchFamily="34" charset="-120"/>
               </a:rPr>
-              <a:t>恩典的記號</a:t>
-            </a:r>
-            <a:endParaRPr lang="zh-TW" altLang="en-US" sz="4000" b="1" dirty="0">
+              <a:t>在風雨中  耶穌將我緊緊擁抱</a:t>
+            </a:r>
+          </a:p>
+          <a:p>
+            <a:pPr algn="ctr">
+              <a:buNone/>
+            </a:pPr>
+            <a:r>
+              <a:rPr lang="zh-TW" altLang="en-US" sz="4800" b="1" dirty="0">
+                <a:solidFill>
+                  <a:srgbClr val="660033"/>
+                </a:solidFill>
+                <a:latin typeface="微軟正黑體" pitchFamily="34" charset="-120"/>
+                <a:ea typeface="微軟正黑體" pitchFamily="34" charset="-120"/>
+              </a:rPr>
+              <a:t>我深知道  祂是我永遠的依靠</a:t>
+            </a:r>
+            <a:endParaRPr lang="en-US" altLang="zh-TW" sz="4800" b="1" dirty="0">
               <a:solidFill>
                 <a:srgbClr val="660033"/>
               </a:solidFill>
@@ -3112,60 +3213,148 @@
       </p:sp>
       <p:sp>
         <p:nvSpPr>
-          <p:cNvPr id="5" name="內容版面配置區 4"/>
-          <p:cNvSpPr>
-            <a:spLocks noGrp="1"/>
-          </p:cNvSpPr>
-          <p:nvPr>
-            <p:ph idx="1"/>
-          </p:nvPr>
+          <p:cNvPr id="3" name="TextBox 2">
+            <a:extLst>
+              <a:ext uri="{FF2B5EF4-FFF2-40B4-BE49-F238E27FC236}">
+                <a16:creationId xmlns:a16="http://schemas.microsoft.com/office/drawing/2014/main" id="{8DC174AB-85F7-F77E-0B7D-04EA45D307B1}"/>
+              </a:ext>
+            </a:extLst>
+          </p:cNvPr>
+          <p:cNvSpPr txBox="1"/>
+          <p:nvPr/>
         </p:nvSpPr>
         <p:spPr>
           <a:xfrm>
-            <a:off x="0" y="1200151"/>
-            <a:ext cx="9144000" cy="3394472"/>
+            <a:off x="0" y="3867894"/>
+            <a:ext cx="9144000" cy="461665"/>
           </a:xfrm>
+          <a:prstGeom prst="rect">
+            <a:avLst/>
+          </a:prstGeom>
+          <a:noFill/>
         </p:spPr>
         <p:txBody>
-          <a:bodyPr>
-            <a:noAutofit/>
+          <a:bodyPr wrap="square" rtlCol="0">
+            <a:spAutoFit/>
           </a:bodyPr>
           <a:lstStyle/>
           <a:p>
-            <a:pPr algn="ctr">
-              <a:buNone/>
-            </a:pPr>
-            <a:r>
-              <a:rPr lang="zh-TW" altLang="en-US" sz="4800" b="1" dirty="0" smtClean="0">
-                <a:solidFill>
-                  <a:srgbClr val="660033"/>
-                </a:solidFill>
-                <a:latin typeface="微軟正黑體" pitchFamily="34" charset="-120"/>
-                <a:ea typeface="微軟正黑體" pitchFamily="34" charset="-120"/>
-              </a:rPr>
-              <a:t>站在大海邊</a:t>
-            </a:r>
-            <a:endParaRPr lang="en-US" altLang="zh-TW" sz="4800" b="1" dirty="0" smtClean="0">
+            <a:pPr algn="ctr"/>
+            <a:r>
+              <a:rPr lang="en-US" sz="2400" b="1" dirty="0">
+                <a:solidFill>
+                  <a:srgbClr val="660033"/>
+                </a:solidFill>
+                <a:latin typeface="Microsoft JhengHei" panose="020B0604030504040204" pitchFamily="34" charset="-120"/>
+                <a:ea typeface="Microsoft JhengHei" panose="020B0604030504040204" pitchFamily="34" charset="-120"/>
+              </a:rPr>
+              <a:t>( </a:t>
+            </a:r>
+            <a:r>
+              <a:rPr lang="zh-CN" altLang="en-US" sz="2400" b="1" dirty="0">
+                <a:solidFill>
+                  <a:srgbClr val="660033"/>
+                </a:solidFill>
+                <a:latin typeface="Microsoft JhengHei" panose="020B0604030504040204" pitchFamily="34" charset="-120"/>
+                <a:ea typeface="Microsoft JhengHei" panose="020B0604030504040204" pitchFamily="34" charset="-120"/>
+              </a:rPr>
+              <a:t>副歌</a:t>
+            </a:r>
+            <a:r>
+              <a:rPr lang="en-US" sz="2400" b="1" dirty="0">
+                <a:solidFill>
+                  <a:srgbClr val="660033"/>
+                </a:solidFill>
+                <a:latin typeface="Microsoft JhengHei" panose="020B0604030504040204" pitchFamily="34" charset="-120"/>
+                <a:ea typeface="Microsoft JhengHei" panose="020B0604030504040204" pitchFamily="34" charset="-120"/>
+              </a:rPr>
+              <a:t> )</a:t>
+            </a:r>
+            <a:endParaRPr lang="vi-VN" sz="2400" b="1" dirty="0">
               <a:solidFill>
                 <a:srgbClr val="660033"/>
               </a:solidFill>
-              <a:latin typeface="微軟正黑體" pitchFamily="34" charset="-120"/>
-              <a:ea typeface="微軟正黑體" pitchFamily="34" charset="-120"/>
+              <a:ea typeface="Microsoft JhengHei" panose="020B0604030504040204" pitchFamily="34" charset="-120"/>
             </a:endParaRPr>
           </a:p>
+        </p:txBody>
+      </p:sp>
+    </p:spTree>
+    <p:extLst>
+      <p:ext uri="{BB962C8B-B14F-4D97-AF65-F5344CB8AC3E}">
+        <p14:creationId xmlns:p14="http://schemas.microsoft.com/office/powerpoint/2010/main" val="4134016590"/>
+      </p:ext>
+    </p:extLst>
+  </p:cSld>
+  <p:clrMapOvr>
+    <a:masterClrMapping/>
+  </p:clrMapOvr>
+</p:sld>
+</file>
+
+<file path=ppt/slides/slide11.xml><?xml version="1.0" encoding="utf-8"?>
+<p:sld xmlns:a="http://schemas.openxmlformats.org/drawingml/2006/main" xmlns:r="http://schemas.openxmlformats.org/officeDocument/2006/relationships" xmlns:p="http://schemas.openxmlformats.org/presentationml/2006/main">
+  <p:cSld>
+    <p:spTree>
+      <p:nvGrpSpPr>
+        <p:cNvPr id="1" name="">
+          <a:extLst>
+            <a:ext uri="{FF2B5EF4-FFF2-40B4-BE49-F238E27FC236}">
+              <a16:creationId xmlns:a16="http://schemas.microsoft.com/office/drawing/2014/main" id="{3380F48E-5F6B-E773-D950-15296544837E}"/>
+            </a:ext>
+          </a:extLst>
+        </p:cNvPr>
+        <p:cNvGrpSpPr/>
+        <p:nvPr/>
+      </p:nvGrpSpPr>
+      <p:grpSpPr>
+        <a:xfrm>
+          <a:off x="0" y="0"/>
+          <a:ext cx="0" cy="0"/>
+          <a:chOff x="0" y="0"/>
+          <a:chExt cx="0" cy="0"/>
+        </a:xfrm>
+      </p:grpSpPr>
+      <p:sp>
+        <p:nvSpPr>
+          <p:cNvPr id="5" name="內容版面配置區 4">
+            <a:extLst>
+              <a:ext uri="{FF2B5EF4-FFF2-40B4-BE49-F238E27FC236}">
+                <a16:creationId xmlns:a16="http://schemas.microsoft.com/office/drawing/2014/main" id="{91788DA3-70E5-A831-36CF-331E3DB5DCF2}"/>
+              </a:ext>
+            </a:extLst>
+          </p:cNvPr>
+          <p:cNvSpPr>
+            <a:spLocks noGrp="1"/>
+          </p:cNvSpPr>
+          <p:nvPr>
+            <p:ph idx="1"/>
+          </p:nvPr>
+        </p:nvSpPr>
+        <p:spPr>
+          <a:xfrm>
+            <a:off x="0" y="1563638"/>
+            <a:ext cx="9144000" cy="1803647"/>
+          </a:xfrm>
+        </p:spPr>
+        <p:txBody>
+          <a:bodyPr anchor="ctr">
+            <a:normAutofit/>
+          </a:bodyPr>
+          <a:lstStyle/>
           <a:p>
             <a:pPr algn="ctr">
               <a:buNone/>
             </a:pPr>
             <a:r>
-              <a:rPr lang="zh-TW" altLang="en-US" sz="4800" b="1" dirty="0" smtClean="0">
+              <a:rPr lang="zh-TW" altLang="en-US" sz="4800" b="1" dirty="0">
                 <a:solidFill>
                   <a:srgbClr val="660033"/>
                 </a:solidFill>
                 <a:latin typeface="微軟正黑體" pitchFamily="34" charset="-120"/>
                 <a:ea typeface="微軟正黑體" pitchFamily="34" charset="-120"/>
               </a:rPr>
-              <a:t>才發現自己是多渺小</a:t>
+              <a:t>走過的路  有歡笑有淚水</a:t>
             </a:r>
           </a:p>
           <a:p>
@@ -3173,41 +3362,92 @@
               <a:buNone/>
             </a:pPr>
             <a:r>
-              <a:rPr lang="zh-TW" altLang="en-US" sz="4800" b="1" dirty="0" smtClean="0">
+              <a:rPr lang="zh-TW" altLang="en-US" sz="4800" b="1" dirty="0">
                 <a:solidFill>
                   <a:srgbClr val="660033"/>
                 </a:solidFill>
                 <a:latin typeface="微軟正黑體" pitchFamily="34" charset="-120"/>
                 <a:ea typeface="微軟正黑體" pitchFamily="34" charset="-120"/>
               </a:rPr>
-              <a:t>登上最高山</a:t>
-            </a:r>
-            <a:endParaRPr lang="en-US" altLang="zh-TW" sz="4800" b="1" dirty="0" smtClean="0">
+              <a:t>將成為主恩典的記號 </a:t>
+            </a:r>
+          </a:p>
+        </p:txBody>
+      </p:sp>
+      <p:sp>
+        <p:nvSpPr>
+          <p:cNvPr id="3" name="TextBox 2">
+            <a:extLst>
+              <a:ext uri="{FF2B5EF4-FFF2-40B4-BE49-F238E27FC236}">
+                <a16:creationId xmlns:a16="http://schemas.microsoft.com/office/drawing/2014/main" id="{C82E8801-4365-E30A-9A3D-FBE7530212FF}"/>
+              </a:ext>
+            </a:extLst>
+          </p:cNvPr>
+          <p:cNvSpPr txBox="1"/>
+          <p:nvPr/>
+        </p:nvSpPr>
+        <p:spPr>
+          <a:xfrm>
+            <a:off x="0" y="3867894"/>
+            <a:ext cx="9144000" cy="461665"/>
+          </a:xfrm>
+          <a:prstGeom prst="rect">
+            <a:avLst/>
+          </a:prstGeom>
+          <a:noFill/>
+        </p:spPr>
+        <p:txBody>
+          <a:bodyPr wrap="square" rtlCol="0">
+            <a:spAutoFit/>
+          </a:bodyPr>
+          <a:lstStyle/>
+          <a:p>
+            <a:pPr algn="ctr"/>
+            <a:r>
+              <a:rPr lang="en-US" sz="2400" b="1" dirty="0">
+                <a:solidFill>
+                  <a:srgbClr val="660033"/>
+                </a:solidFill>
+                <a:latin typeface="Microsoft JhengHei" panose="020B0604030504040204" pitchFamily="34" charset="-120"/>
+                <a:ea typeface="Microsoft JhengHei" panose="020B0604030504040204" pitchFamily="34" charset="-120"/>
+              </a:rPr>
+              <a:t>( </a:t>
+            </a:r>
+            <a:r>
+              <a:rPr lang="zh-CN" altLang="en-US" sz="2400" b="1" dirty="0">
+                <a:solidFill>
+                  <a:srgbClr val="660033"/>
+                </a:solidFill>
+                <a:latin typeface="Microsoft JhengHei" panose="020B0604030504040204" pitchFamily="34" charset="-120"/>
+                <a:ea typeface="Microsoft JhengHei" panose="020B0604030504040204" pitchFamily="34" charset="-120"/>
+              </a:rPr>
+              <a:t>副歌</a:t>
+            </a:r>
+            <a:r>
+              <a:rPr lang="en-US" sz="2400" b="1" dirty="0">
+                <a:solidFill>
+                  <a:srgbClr val="660033"/>
+                </a:solidFill>
+                <a:latin typeface="Microsoft JhengHei" panose="020B0604030504040204" pitchFamily="34" charset="-120"/>
+                <a:ea typeface="Microsoft JhengHei" panose="020B0604030504040204" pitchFamily="34" charset="-120"/>
+              </a:rPr>
+              <a:t> )</a:t>
+            </a:r>
+            <a:endParaRPr lang="vi-VN" sz="2400" b="1" dirty="0">
               <a:solidFill>
                 <a:srgbClr val="660033"/>
               </a:solidFill>
-              <a:latin typeface="微軟正黑體" pitchFamily="34" charset="-120"/>
-              <a:ea typeface="微軟正黑體" pitchFamily="34" charset="-120"/>
+              <a:ea typeface="Microsoft JhengHei" panose="020B0604030504040204" pitchFamily="34" charset="-120"/>
             </a:endParaRPr>
           </a:p>
-          <a:p>
-            <a:pPr algn="ctr">
-              <a:buNone/>
-            </a:pPr>
-            <a:r>
-              <a:rPr lang="zh-TW" altLang="en-US" sz="4800" b="1" dirty="0" smtClean="0">
-                <a:solidFill>
-                  <a:srgbClr val="660033"/>
-                </a:solidFill>
-                <a:latin typeface="微軟正黑體" pitchFamily="34" charset="-120"/>
-                <a:ea typeface="微軟正黑體" pitchFamily="34" charset="-120"/>
-              </a:rPr>
-              <a:t>才發現天有多高</a:t>
-            </a:r>
-          </a:p>
         </p:txBody>
       </p:sp>
     </p:spTree>
+    <p:extLst>
+      <p:ext uri="{BB962C8B-B14F-4D97-AF65-F5344CB8AC3E}">
+        <p14:creationId xmlns:p14="http://schemas.microsoft.com/office/powerpoint/2010/main" val="3427163211"/>
+      </p:ext>
+    </p:extLst>
   </p:cSld>
   <p:clrMapOvr>
     <a:masterClrMapping/>
@@ -3234,75 +3474,38 @@
       </p:grpSpPr>
       <p:sp>
         <p:nvSpPr>
-          <p:cNvPr id="4" name="標題 3"/>
-          <p:cNvSpPr>
-            <a:spLocks noGrp="1"/>
-          </p:cNvSpPr>
-          <p:nvPr>
-            <p:ph type="title"/>
-          </p:nvPr>
-        </p:nvSpPr>
-        <p:spPr/>
-        <p:txBody>
-          <a:bodyPr>
+          <p:cNvPr id="5" name="內容版面配置區 4"/>
+          <p:cNvSpPr>
+            <a:spLocks noGrp="1"/>
+          </p:cNvSpPr>
+          <p:nvPr>
+            <p:ph idx="1"/>
+          </p:nvPr>
+        </p:nvSpPr>
+        <p:spPr>
+          <a:xfrm>
+            <a:off x="0" y="1563638"/>
+            <a:ext cx="9144000" cy="1803647"/>
+          </a:xfrm>
+        </p:spPr>
+        <p:txBody>
+          <a:bodyPr anchor="ctr">
             <a:normAutofit/>
           </a:bodyPr>
           <a:lstStyle/>
           <a:p>
-            <a:r>
-              <a:rPr lang="zh-TW" altLang="en-US" sz="4000" b="1" dirty="0">
+            <a:pPr algn="ctr">
+              <a:buNone/>
+            </a:pPr>
+            <a:r>
+              <a:rPr lang="zh-TW" altLang="en-US" sz="4800" b="1" dirty="0">
                 <a:solidFill>
                   <a:srgbClr val="660033"/>
                 </a:solidFill>
                 <a:latin typeface="微軟正黑體" pitchFamily="34" charset="-120"/>
                 <a:ea typeface="微軟正黑體" pitchFamily="34" charset="-120"/>
               </a:rPr>
-              <a:t>恩典的記號</a:t>
-            </a:r>
-            <a:endParaRPr lang="zh-TW" altLang="en-US" sz="4000" b="1" dirty="0">
-              <a:solidFill>
-                <a:srgbClr val="660033"/>
-              </a:solidFill>
-              <a:latin typeface="微軟正黑體" pitchFamily="34" charset="-120"/>
-              <a:ea typeface="微軟正黑體" pitchFamily="34" charset="-120"/>
-            </a:endParaRPr>
-          </a:p>
-        </p:txBody>
-      </p:sp>
-      <p:sp>
-        <p:nvSpPr>
-          <p:cNvPr id="5" name="內容版面配置區 4"/>
-          <p:cNvSpPr>
-            <a:spLocks noGrp="1"/>
-          </p:cNvSpPr>
-          <p:nvPr>
-            <p:ph idx="1"/>
-          </p:nvPr>
-        </p:nvSpPr>
-        <p:spPr>
-          <a:xfrm>
-            <a:off x="0" y="1200151"/>
-            <a:ext cx="9144000" cy="3394472"/>
-          </a:xfrm>
-        </p:spPr>
-        <p:txBody>
-          <a:bodyPr>
-            <a:noAutofit/>
-          </a:bodyPr>
-          <a:lstStyle/>
-          <a:p>
-            <a:pPr algn="ctr">
-              <a:buNone/>
-            </a:pPr>
-            <a:r>
-              <a:rPr lang="zh-TW" altLang="en-US" sz="4800" b="1" dirty="0">
-                <a:solidFill>
-                  <a:srgbClr val="660033"/>
-                </a:solidFill>
-                <a:latin typeface="微軟正黑體" pitchFamily="34" charset="-120"/>
-                <a:ea typeface="微軟正黑體" pitchFamily="34" charset="-120"/>
-              </a:rPr>
-              <a:t>浩瀚的宇宙中</a:t>
+              <a:t>站在大海邊</a:t>
             </a:r>
             <a:endParaRPr lang="en-US" altLang="zh-TW" sz="4800" b="1" dirty="0">
               <a:solidFill>
@@ -3324,23 +3527,70 @@
                 <a:latin typeface="微軟正黑體" pitchFamily="34" charset="-120"/>
                 <a:ea typeface="微軟正黑體" pitchFamily="34" charset="-120"/>
               </a:rPr>
-              <a:t>我真的微不足道</a:t>
-            </a:r>
-          </a:p>
-          <a:p>
-            <a:pPr algn="ctr">
-              <a:buNone/>
-            </a:pPr>
-            <a:r>
-              <a:rPr lang="zh-TW" altLang="en-US" sz="4800" b="1" dirty="0">
-                <a:solidFill>
-                  <a:srgbClr val="660033"/>
-                </a:solidFill>
-                <a:latin typeface="微軟正黑體" pitchFamily="34" charset="-120"/>
-                <a:ea typeface="微軟正黑體" pitchFamily="34" charset="-120"/>
-              </a:rPr>
-              <a:t>像灰塵 消失也沒人知道</a:t>
-            </a:r>
+              <a:t>才發現自己是多渺小</a:t>
+            </a:r>
+          </a:p>
+        </p:txBody>
+      </p:sp>
+      <p:sp>
+        <p:nvSpPr>
+          <p:cNvPr id="3" name="TextBox 2"/>
+          <p:cNvSpPr txBox="1"/>
+          <p:nvPr/>
+        </p:nvSpPr>
+        <p:spPr>
+          <a:xfrm>
+            <a:off x="0" y="3867894"/>
+            <a:ext cx="9144000" cy="461665"/>
+          </a:xfrm>
+          <a:prstGeom prst="rect">
+            <a:avLst/>
+          </a:prstGeom>
+          <a:noFill/>
+        </p:spPr>
+        <p:txBody>
+          <a:bodyPr wrap="square" rtlCol="0">
+            <a:spAutoFit/>
+          </a:bodyPr>
+          <a:lstStyle/>
+          <a:p>
+            <a:pPr algn="ctr"/>
+            <a:r>
+              <a:rPr lang="en-US" sz="2400" b="1" dirty="0">
+                <a:solidFill>
+                  <a:srgbClr val="660033"/>
+                </a:solidFill>
+                <a:latin typeface="Microsoft JhengHei" panose="020B0604030504040204" pitchFamily="34" charset="-120"/>
+                <a:ea typeface="Microsoft JhengHei" panose="020B0604030504040204" pitchFamily="34" charset="-120"/>
+              </a:rPr>
+              <a:t>( </a:t>
+            </a:r>
+            <a:r>
+              <a:rPr lang="zh-CN" altLang="en-US" sz="2400" b="1" dirty="0">
+                <a:solidFill>
+                  <a:srgbClr val="660033"/>
+                </a:solidFill>
+                <a:latin typeface="Microsoft JhengHei" panose="020B0604030504040204" pitchFamily="34" charset="-120"/>
+                <a:ea typeface="Microsoft JhengHei" panose="020B0604030504040204" pitchFamily="34" charset="-120"/>
+              </a:rPr>
+              <a:t>正歌</a:t>
+            </a:r>
+            <a:r>
+              <a:rPr lang="en-US" sz="2400" b="1" dirty="0">
+                <a:solidFill>
+                  <a:srgbClr val="660033"/>
+                </a:solidFill>
+                <a:latin typeface="Microsoft JhengHei" panose="020B0604030504040204" pitchFamily="34" charset="-120"/>
+                <a:ea typeface="Microsoft JhengHei" panose="020B0604030504040204" pitchFamily="34" charset="-120"/>
+              </a:rPr>
+              <a:t> )</a:t>
+            </a:r>
+            <a:endParaRPr lang="vi-VN" sz="2400" b="1" dirty="0">
+              <a:solidFill>
+                <a:srgbClr val="660033"/>
+              </a:solidFill>
+              <a:ea typeface="Microsoft JhengHei" panose="020B0604030504040204" pitchFamily="34" charset="-120"/>
+            </a:endParaRPr>
           </a:p>
         </p:txBody>
       </p:sp>
@@ -3357,7 +3607,13 @@
   <p:cSld>
     <p:spTree>
       <p:nvGrpSpPr>
-        <p:cNvPr id="1" name=""/>
+        <p:cNvPr id="1" name="">
+          <a:extLst>
+            <a:ext uri="{FF2B5EF4-FFF2-40B4-BE49-F238E27FC236}">
+              <a16:creationId xmlns:a16="http://schemas.microsoft.com/office/drawing/2014/main" id="{16A24D60-54B4-D869-5DBB-E5C95EB9CAF6}"/>
+            </a:ext>
+          </a:extLst>
+        </p:cNvPr>
         <p:cNvGrpSpPr/>
         <p:nvPr/>
       </p:nvGrpSpPr>
@@ -3371,164 +3627,44 @@
       </p:grpSpPr>
       <p:sp>
         <p:nvSpPr>
-          <p:cNvPr id="4" name="標題 3"/>
-          <p:cNvSpPr>
-            <a:spLocks noGrp="1"/>
-          </p:cNvSpPr>
-          <p:nvPr>
-            <p:ph type="title"/>
-          </p:nvPr>
-        </p:nvSpPr>
-        <p:spPr/>
-        <p:txBody>
-          <a:bodyPr>
+          <p:cNvPr id="5" name="內容版面配置區 4">
+            <a:extLst>
+              <a:ext uri="{FF2B5EF4-FFF2-40B4-BE49-F238E27FC236}">
+                <a16:creationId xmlns:a16="http://schemas.microsoft.com/office/drawing/2014/main" id="{1A9BE2B4-25BE-3ED5-E20F-7C5F765ACB72}"/>
+              </a:ext>
+            </a:extLst>
+          </p:cNvPr>
+          <p:cNvSpPr>
+            <a:spLocks noGrp="1"/>
+          </p:cNvSpPr>
+          <p:nvPr>
+            <p:ph idx="1"/>
+          </p:nvPr>
+        </p:nvSpPr>
+        <p:spPr>
+          <a:xfrm>
+            <a:off x="0" y="1563638"/>
+            <a:ext cx="9144000" cy="1803647"/>
+          </a:xfrm>
+        </p:spPr>
+        <p:txBody>
+          <a:bodyPr anchor="ctr">
             <a:normAutofit/>
           </a:bodyPr>
           <a:lstStyle/>
           <a:p>
-            <a:r>
-              <a:rPr lang="zh-TW" altLang="en-US" sz="4000" b="1" dirty="0">
+            <a:pPr algn="ctr">
+              <a:buNone/>
+            </a:pPr>
+            <a:r>
+              <a:rPr lang="zh-TW" altLang="en-US" sz="4800" b="1" dirty="0">
                 <a:solidFill>
                   <a:srgbClr val="660033"/>
                 </a:solidFill>
                 <a:latin typeface="微軟正黑體" pitchFamily="34" charset="-120"/>
                 <a:ea typeface="微軟正黑體" pitchFamily="34" charset="-120"/>
               </a:rPr>
-              <a:t>恩典的記號</a:t>
-            </a:r>
-            <a:endParaRPr lang="zh-TW" altLang="en-US" sz="4000" b="1" dirty="0">
-              <a:solidFill>
-                <a:srgbClr val="660033"/>
-              </a:solidFill>
-              <a:latin typeface="微軟正黑體" pitchFamily="34" charset="-120"/>
-              <a:ea typeface="微軟正黑體" pitchFamily="34" charset="-120"/>
-            </a:endParaRPr>
-          </a:p>
-        </p:txBody>
-      </p:sp>
-      <p:sp>
-        <p:nvSpPr>
-          <p:cNvPr id="5" name="內容版面配置區 4"/>
-          <p:cNvSpPr>
-            <a:spLocks noGrp="1"/>
-          </p:cNvSpPr>
-          <p:nvPr>
-            <p:ph idx="1"/>
-          </p:nvPr>
-        </p:nvSpPr>
-        <p:spPr>
-          <a:xfrm>
-            <a:off x="0" y="1200151"/>
-            <a:ext cx="9144000" cy="3394472"/>
-          </a:xfrm>
-        </p:spPr>
-        <p:txBody>
-          <a:bodyPr>
-            <a:noAutofit/>
-          </a:bodyPr>
-          <a:lstStyle/>
-          <a:p>
-            <a:pPr algn="ctr">
-              <a:buNone/>
-            </a:pPr>
-            <a:r>
-              <a:rPr lang="zh-TW" altLang="en-US" sz="4800" b="1" dirty="0">
-                <a:solidFill>
-                  <a:srgbClr val="660033"/>
-                </a:solidFill>
-                <a:latin typeface="微軟正黑體" pitchFamily="34" charset="-120"/>
-                <a:ea typeface="微軟正黑體" pitchFamily="34" charset="-120"/>
-              </a:rPr>
-              <a:t>夜空的星</a:t>
-            </a:r>
-            <a:r>
-              <a:rPr lang="zh-TW" altLang="en-US" sz="4800" b="1" dirty="0" smtClean="0">
-                <a:solidFill>
-                  <a:srgbClr val="660033"/>
-                </a:solidFill>
-                <a:latin typeface="微軟正黑體" pitchFamily="34" charset="-120"/>
-                <a:ea typeface="微軟正黑體" pitchFamily="34" charset="-120"/>
-              </a:rPr>
-              <a:t>星</a:t>
-            </a:r>
-            <a:endParaRPr lang="en-US" altLang="zh-TW" sz="4800" b="1" dirty="0" smtClean="0">
-              <a:solidFill>
-                <a:srgbClr val="660033"/>
-              </a:solidFill>
-              <a:latin typeface="微軟正黑體" pitchFamily="34" charset="-120"/>
-              <a:ea typeface="微軟正黑體" pitchFamily="34" charset="-120"/>
-            </a:endParaRPr>
-          </a:p>
-          <a:p>
-            <a:pPr algn="ctr">
-              <a:buNone/>
-            </a:pPr>
-            <a:r>
-              <a:rPr lang="zh-TW" altLang="en-US" sz="4800" b="1" dirty="0" smtClean="0">
-                <a:solidFill>
-                  <a:srgbClr val="660033"/>
-                </a:solidFill>
-                <a:latin typeface="微軟正黑體" pitchFamily="34" charset="-120"/>
-                <a:ea typeface="微軟正黑體" pitchFamily="34" charset="-120"/>
-              </a:rPr>
-              <a:t>彷彿在對著我微微笑</a:t>
-            </a:r>
-          </a:p>
-          <a:p>
-            <a:pPr algn="ctr">
-              <a:buNone/>
-            </a:pPr>
-            <a:r>
-              <a:rPr lang="zh-TW" altLang="en-US" sz="4800" b="1" dirty="0" smtClean="0">
-                <a:solidFill>
-                  <a:srgbClr val="660033"/>
-                </a:solidFill>
-                <a:latin typeface="微軟正黑體" pitchFamily="34" charset="-120"/>
-                <a:ea typeface="微軟正黑體" pitchFamily="34" charset="-120"/>
-              </a:rPr>
-              <a:t>輕</a:t>
-            </a:r>
-            <a:r>
-              <a:rPr lang="zh-TW" altLang="en-US" sz="4800" b="1" dirty="0">
-                <a:solidFill>
-                  <a:srgbClr val="660033"/>
-                </a:solidFill>
-                <a:latin typeface="微軟正黑體" pitchFamily="34" charset="-120"/>
-                <a:ea typeface="微軟正黑體" pitchFamily="34" charset="-120"/>
-              </a:rPr>
-              <a:t>聲告訴</a:t>
-            </a:r>
-            <a:r>
-              <a:rPr lang="zh-TW" altLang="en-US" sz="4800" b="1" dirty="0" smtClean="0">
-                <a:solidFill>
-                  <a:srgbClr val="660033"/>
-                </a:solidFill>
-                <a:latin typeface="微軟正黑體" pitchFamily="34" charset="-120"/>
-                <a:ea typeface="微軟正黑體" pitchFamily="34" charset="-120"/>
-              </a:rPr>
-              <a:t>我</a:t>
-            </a:r>
-            <a:endParaRPr lang="en-US" altLang="zh-TW" sz="4800" b="1" dirty="0" smtClean="0">
-              <a:solidFill>
-                <a:srgbClr val="660033"/>
-              </a:solidFill>
-              <a:latin typeface="微軟正黑體" pitchFamily="34" charset="-120"/>
-              <a:ea typeface="微軟正黑體" pitchFamily="34" charset="-120"/>
-            </a:endParaRPr>
-          </a:p>
-          <a:p>
-            <a:pPr algn="ctr">
-              <a:buNone/>
-            </a:pPr>
-            <a:r>
-              <a:rPr lang="zh-TW" altLang="en-US" sz="4800" b="1" dirty="0" smtClean="0">
-                <a:solidFill>
-                  <a:srgbClr val="660033"/>
-                </a:solidFill>
-                <a:latin typeface="微軟正黑體" pitchFamily="34" charset="-120"/>
-                <a:ea typeface="微軟正黑體" pitchFamily="34" charset="-120"/>
-              </a:rPr>
-              <a:t>一切祂都看見了</a:t>
+              <a:t>登上最高山</a:t>
             </a:r>
             <a:endParaRPr lang="en-US" altLang="zh-TW" sz="4800" b="1" dirty="0">
               <a:solidFill>
@@ -3538,9 +3674,97 @@
               <a:ea typeface="微軟正黑體" pitchFamily="34" charset="-120"/>
             </a:endParaRPr>
           </a:p>
+          <a:p>
+            <a:pPr algn="ctr">
+              <a:buNone/>
+            </a:pPr>
+            <a:r>
+              <a:rPr lang="zh-TW" altLang="en-US" sz="4800" b="1" dirty="0">
+                <a:solidFill>
+                  <a:srgbClr val="660033"/>
+                </a:solidFill>
+                <a:latin typeface="微軟正黑體" pitchFamily="34" charset="-120"/>
+                <a:ea typeface="微軟正黑體" pitchFamily="34" charset="-120"/>
+              </a:rPr>
+              <a:t>才發現天有多高</a:t>
+            </a:r>
+          </a:p>
+        </p:txBody>
+      </p:sp>
+      <p:sp>
+        <p:nvSpPr>
+          <p:cNvPr id="3" name="TextBox 2">
+            <a:extLst>
+              <a:ext uri="{FF2B5EF4-FFF2-40B4-BE49-F238E27FC236}">
+                <a16:creationId xmlns:a16="http://schemas.microsoft.com/office/drawing/2014/main" id="{32F098D5-60EF-75BD-E580-45560C396EBC}"/>
+              </a:ext>
+            </a:extLst>
+          </p:cNvPr>
+          <p:cNvSpPr txBox="1"/>
+          <p:nvPr/>
+        </p:nvSpPr>
+        <p:spPr>
+          <a:xfrm>
+            <a:off x="0" y="3867894"/>
+            <a:ext cx="9144000" cy="461665"/>
+          </a:xfrm>
+          <a:prstGeom prst="rect">
+            <a:avLst/>
+          </a:prstGeom>
+          <a:noFill/>
+        </p:spPr>
+        <p:txBody>
+          <a:bodyPr wrap="square" rtlCol="0">
+            <a:spAutoFit/>
+          </a:bodyPr>
+          <a:lstStyle/>
+          <a:p>
+            <a:pPr algn="ctr"/>
+            <a:r>
+              <a:rPr lang="en-US" sz="2400" b="1" dirty="0">
+                <a:solidFill>
+                  <a:srgbClr val="660033"/>
+                </a:solidFill>
+                <a:latin typeface="Microsoft JhengHei" panose="020B0604030504040204" pitchFamily="34" charset="-120"/>
+                <a:ea typeface="Microsoft JhengHei" panose="020B0604030504040204" pitchFamily="34" charset="-120"/>
+              </a:rPr>
+              <a:t>( </a:t>
+            </a:r>
+            <a:r>
+              <a:rPr lang="zh-CN" altLang="en-US" sz="2400" b="1" dirty="0">
+                <a:solidFill>
+                  <a:srgbClr val="660033"/>
+                </a:solidFill>
+                <a:latin typeface="Microsoft JhengHei" panose="020B0604030504040204" pitchFamily="34" charset="-120"/>
+                <a:ea typeface="Microsoft JhengHei" panose="020B0604030504040204" pitchFamily="34" charset="-120"/>
+              </a:rPr>
+              <a:t>正歌</a:t>
+            </a:r>
+            <a:r>
+              <a:rPr lang="en-US" sz="2400" b="1" dirty="0">
+                <a:solidFill>
+                  <a:srgbClr val="660033"/>
+                </a:solidFill>
+                <a:latin typeface="Microsoft JhengHei" panose="020B0604030504040204" pitchFamily="34" charset="-120"/>
+                <a:ea typeface="Microsoft JhengHei" panose="020B0604030504040204" pitchFamily="34" charset="-120"/>
+              </a:rPr>
+              <a:t> )</a:t>
+            </a:r>
+            <a:endParaRPr lang="vi-VN" sz="2400" b="1" dirty="0">
+              <a:solidFill>
+                <a:srgbClr val="660033"/>
+              </a:solidFill>
+              <a:ea typeface="Microsoft JhengHei" panose="020B0604030504040204" pitchFamily="34" charset="-120"/>
+            </a:endParaRPr>
+          </a:p>
         </p:txBody>
       </p:sp>
     </p:spTree>
+    <p:extLst>
+      <p:ext uri="{BB962C8B-B14F-4D97-AF65-F5344CB8AC3E}">
+        <p14:creationId xmlns:p14="http://schemas.microsoft.com/office/powerpoint/2010/main" val="2369938836"/>
+      </p:ext>
+    </p:extLst>
   </p:cSld>
   <p:clrMapOvr>
     <a:masterClrMapping/>
@@ -3553,7 +3777,13 @@
   <p:cSld>
     <p:spTree>
       <p:nvGrpSpPr>
-        <p:cNvPr id="1" name=""/>
+        <p:cNvPr id="1" name="">
+          <a:extLst>
+            <a:ext uri="{FF2B5EF4-FFF2-40B4-BE49-F238E27FC236}">
+              <a16:creationId xmlns:a16="http://schemas.microsoft.com/office/drawing/2014/main" id="{426B8DEE-DDAE-8960-C35C-F2C91D3153BB}"/>
+            </a:ext>
+          </a:extLst>
+        </p:cNvPr>
         <p:cNvGrpSpPr/>
         <p:nvPr/>
       </p:nvGrpSpPr>
@@ -3567,32 +3797,66 @@
       </p:grpSpPr>
       <p:sp>
         <p:nvSpPr>
-          <p:cNvPr id="4" name="標題 3"/>
-          <p:cNvSpPr>
-            <a:spLocks noGrp="1"/>
-          </p:cNvSpPr>
-          <p:nvPr>
-            <p:ph type="title"/>
-          </p:nvPr>
-        </p:nvSpPr>
-        <p:spPr/>
-        <p:txBody>
-          <a:bodyPr>
+          <p:cNvPr id="5" name="內容版面配置區 4">
+            <a:extLst>
+              <a:ext uri="{FF2B5EF4-FFF2-40B4-BE49-F238E27FC236}">
+                <a16:creationId xmlns:a16="http://schemas.microsoft.com/office/drawing/2014/main" id="{E40297E7-3E90-B0F3-4D60-AE13C9E22EA9}"/>
+              </a:ext>
+            </a:extLst>
+          </p:cNvPr>
+          <p:cNvSpPr>
+            <a:spLocks noGrp="1"/>
+          </p:cNvSpPr>
+          <p:nvPr>
+            <p:ph idx="1"/>
+          </p:nvPr>
+        </p:nvSpPr>
+        <p:spPr>
+          <a:xfrm>
+            <a:off x="0" y="1563638"/>
+            <a:ext cx="9144000" cy="1803647"/>
+          </a:xfrm>
+        </p:spPr>
+        <p:txBody>
+          <a:bodyPr anchor="ctr">
             <a:normAutofit/>
           </a:bodyPr>
           <a:lstStyle/>
           <a:p>
-            <a:r>
-              <a:rPr lang="zh-TW" altLang="en-US" sz="4000" b="1" dirty="0">
+            <a:pPr algn="ctr">
+              <a:buNone/>
+            </a:pPr>
+            <a:r>
+              <a:rPr lang="zh-TW" altLang="en-US" sz="4800" b="1" dirty="0">
                 <a:solidFill>
                   <a:srgbClr val="660033"/>
                 </a:solidFill>
                 <a:latin typeface="微軟正黑體" pitchFamily="34" charset="-120"/>
                 <a:ea typeface="微軟正黑體" pitchFamily="34" charset="-120"/>
               </a:rPr>
-              <a:t>恩典的記號</a:t>
-            </a:r>
-            <a:endParaRPr lang="zh-TW" altLang="en-US" sz="4000" b="1" dirty="0">
+              <a:t>浩瀚的宇宙中</a:t>
+            </a:r>
+            <a:r>
+              <a:rPr lang="en-US" altLang="zh-TW" sz="4800" b="1" dirty="0">
+                <a:solidFill>
+                  <a:srgbClr val="660033"/>
+                </a:solidFill>
+                <a:latin typeface="微軟正黑體" pitchFamily="34" charset="-120"/>
+                <a:ea typeface="微軟正黑體" pitchFamily="34" charset="-120"/>
+              </a:rPr>
+              <a:t>  </a:t>
+            </a:r>
+            <a:r>
+              <a:rPr lang="zh-TW" altLang="en-US" sz="4800" b="1" dirty="0">
+                <a:solidFill>
+                  <a:srgbClr val="660033"/>
+                </a:solidFill>
+                <a:latin typeface="微軟正黑體" pitchFamily="34" charset="-120"/>
+                <a:ea typeface="微軟正黑體" pitchFamily="34" charset="-120"/>
+              </a:rPr>
+              <a:t>我真的微不足道</a:t>
+            </a:r>
+            <a:endParaRPr lang="en-US" altLang="zh-TW" sz="4800" b="1" dirty="0">
               <a:solidFill>
                 <a:srgbClr val="660033"/>
               </a:solidFill>
@@ -3600,91 +3864,97 @@
               <a:ea typeface="微軟正黑體" pitchFamily="34" charset="-120"/>
             </a:endParaRPr>
           </a:p>
-        </p:txBody>
-      </p:sp>
-      <p:sp>
-        <p:nvSpPr>
-          <p:cNvPr id="5" name="內容版面配置區 4"/>
-          <p:cNvSpPr>
-            <a:spLocks noGrp="1"/>
-          </p:cNvSpPr>
-          <p:nvPr>
-            <p:ph idx="1"/>
-          </p:nvPr>
+          <a:p>
+            <a:pPr algn="ctr">
+              <a:buNone/>
+            </a:pPr>
+            <a:r>
+              <a:rPr lang="zh-TW" altLang="en-US" sz="4800" b="1" dirty="0">
+                <a:solidFill>
+                  <a:srgbClr val="660033"/>
+                </a:solidFill>
+                <a:latin typeface="微軟正黑體" pitchFamily="34" charset="-120"/>
+                <a:ea typeface="微軟正黑體" pitchFamily="34" charset="-120"/>
+              </a:rPr>
+              <a:t>像灰塵  消失也沒人知道</a:t>
+            </a:r>
+          </a:p>
+        </p:txBody>
+      </p:sp>
+      <p:sp>
+        <p:nvSpPr>
+          <p:cNvPr id="3" name="TextBox 2">
+            <a:extLst>
+              <a:ext uri="{FF2B5EF4-FFF2-40B4-BE49-F238E27FC236}">
+                <a16:creationId xmlns:a16="http://schemas.microsoft.com/office/drawing/2014/main" id="{494B924F-1FAD-1D28-65BE-A31829568DC2}"/>
+              </a:ext>
+            </a:extLst>
+          </p:cNvPr>
+          <p:cNvSpPr txBox="1"/>
+          <p:nvPr/>
         </p:nvSpPr>
         <p:spPr>
           <a:xfrm>
-            <a:off x="0" y="1200151"/>
-            <a:ext cx="9144000" cy="3394472"/>
+            <a:off x="0" y="3867894"/>
+            <a:ext cx="9144000" cy="461665"/>
           </a:xfrm>
+          <a:prstGeom prst="rect">
+            <a:avLst/>
+          </a:prstGeom>
+          <a:noFill/>
         </p:spPr>
         <p:txBody>
-          <a:bodyPr>
-            <a:noAutofit/>
+          <a:bodyPr wrap="square" rtlCol="0">
+            <a:spAutoFit/>
           </a:bodyPr>
           <a:lstStyle/>
           <a:p>
-            <a:pPr algn="ctr">
-              <a:buNone/>
-            </a:pPr>
-            <a:r>
-              <a:rPr lang="zh-TW" altLang="en-US" sz="4800" b="1" dirty="0" smtClean="0">
-                <a:solidFill>
-                  <a:srgbClr val="660033"/>
-                </a:solidFill>
-                <a:latin typeface="微軟正黑體" pitchFamily="34" charset="-120"/>
-                <a:ea typeface="微軟正黑體" pitchFamily="34" charset="-120"/>
-              </a:rPr>
-              <a:t>我所有掙扎</a:t>
-            </a:r>
-            <a:endParaRPr lang="en-US" altLang="zh-TW" sz="4800" b="1" dirty="0" smtClean="0">
+            <a:pPr algn="ctr"/>
+            <a:r>
+              <a:rPr lang="en-US" sz="2400" b="1" dirty="0">
+                <a:solidFill>
+                  <a:srgbClr val="660033"/>
+                </a:solidFill>
+                <a:latin typeface="Microsoft JhengHei" panose="020B0604030504040204" pitchFamily="34" charset="-120"/>
+                <a:ea typeface="Microsoft JhengHei" panose="020B0604030504040204" pitchFamily="34" charset="-120"/>
+              </a:rPr>
+              <a:t>( </a:t>
+            </a:r>
+            <a:r>
+              <a:rPr lang="zh-CN" altLang="en-US" sz="2400" b="1" dirty="0">
+                <a:solidFill>
+                  <a:srgbClr val="660033"/>
+                </a:solidFill>
+                <a:latin typeface="Microsoft JhengHei" panose="020B0604030504040204" pitchFamily="34" charset="-120"/>
+                <a:ea typeface="Microsoft JhengHei" panose="020B0604030504040204" pitchFamily="34" charset="-120"/>
+              </a:rPr>
+              <a:t>正歌</a:t>
+            </a:r>
+            <a:r>
+              <a:rPr lang="en-US" sz="2400" b="1" dirty="0">
+                <a:solidFill>
+                  <a:srgbClr val="660033"/>
+                </a:solidFill>
+                <a:latin typeface="Microsoft JhengHei" panose="020B0604030504040204" pitchFamily="34" charset="-120"/>
+                <a:ea typeface="Microsoft JhengHei" panose="020B0604030504040204" pitchFamily="34" charset="-120"/>
+              </a:rPr>
+              <a:t> )</a:t>
+            </a:r>
+            <a:endParaRPr lang="vi-VN" sz="2400" b="1" dirty="0">
               <a:solidFill>
                 <a:srgbClr val="660033"/>
               </a:solidFill>
-              <a:latin typeface="微軟正黑體" pitchFamily="34" charset="-120"/>
-              <a:ea typeface="微軟正黑體" pitchFamily="34" charset="-120"/>
+              <a:ea typeface="Microsoft JhengHei" panose="020B0604030504040204" pitchFamily="34" charset="-120"/>
             </a:endParaRPr>
           </a:p>
-          <a:p>
-            <a:pPr algn="ctr">
-              <a:buNone/>
-            </a:pPr>
-            <a:r>
-              <a:rPr lang="zh-TW" altLang="en-US" sz="4800" b="1" dirty="0" smtClean="0">
-                <a:solidFill>
-                  <a:srgbClr val="660033"/>
-                </a:solidFill>
-                <a:latin typeface="微軟正黑體" pitchFamily="34" charset="-120"/>
-                <a:ea typeface="微軟正黑體" pitchFamily="34" charset="-120"/>
-              </a:rPr>
-              <a:t>所有軟弱和跌倒</a:t>
-            </a:r>
-          </a:p>
-          <a:p>
-            <a:pPr algn="ctr">
-              <a:buNone/>
-            </a:pPr>
-            <a:r>
-              <a:rPr lang="zh-TW" altLang="en-US" sz="4800" b="1" dirty="0" smtClean="0">
-                <a:solidFill>
-                  <a:srgbClr val="660033"/>
-                </a:solidFill>
-                <a:latin typeface="微軟正黑體" pitchFamily="34" charset="-120"/>
-                <a:ea typeface="微軟正黑體" pitchFamily="34" charset="-120"/>
-              </a:rPr>
-              <a:t>將成為主恩典的記號</a:t>
-            </a:r>
-            <a:endParaRPr lang="zh-TW" altLang="en-US" sz="4800" b="1" dirty="0">
-              <a:solidFill>
-                <a:srgbClr val="660033"/>
-              </a:solidFill>
-              <a:latin typeface="微軟正黑體" pitchFamily="34" charset="-120"/>
-              <a:ea typeface="微軟正黑體" pitchFamily="34" charset="-120"/>
-            </a:endParaRPr>
-          </a:p>
         </p:txBody>
       </p:sp>
     </p:spTree>
+    <p:extLst>
+      <p:ext uri="{BB962C8B-B14F-4D97-AF65-F5344CB8AC3E}">
+        <p14:creationId xmlns:p14="http://schemas.microsoft.com/office/powerpoint/2010/main" val="1311883671"/>
+      </p:ext>
+    </p:extLst>
   </p:cSld>
   <p:clrMapOvr>
     <a:masterClrMapping/>
@@ -3697,7 +3967,13 @@
   <p:cSld>
     <p:spTree>
       <p:nvGrpSpPr>
-        <p:cNvPr id="1" name=""/>
+        <p:cNvPr id="1" name="">
+          <a:extLst>
+            <a:ext uri="{FF2B5EF4-FFF2-40B4-BE49-F238E27FC236}">
+              <a16:creationId xmlns:a16="http://schemas.microsoft.com/office/drawing/2014/main" id="{528D830E-E4B5-01F9-E779-9862318ED725}"/>
+            </a:ext>
+          </a:extLst>
+        </p:cNvPr>
         <p:cNvGrpSpPr/>
         <p:nvPr/>
       </p:nvGrpSpPr>
@@ -3711,90 +3987,44 @@
       </p:grpSpPr>
       <p:sp>
         <p:nvSpPr>
-          <p:cNvPr id="4" name="標題 3"/>
-          <p:cNvSpPr>
-            <a:spLocks noGrp="1"/>
-          </p:cNvSpPr>
-          <p:nvPr>
-            <p:ph type="title"/>
-          </p:nvPr>
-        </p:nvSpPr>
-        <p:spPr/>
-        <p:txBody>
-          <a:bodyPr>
+          <p:cNvPr id="5" name="內容版面配置區 4">
+            <a:extLst>
+              <a:ext uri="{FF2B5EF4-FFF2-40B4-BE49-F238E27FC236}">
+                <a16:creationId xmlns:a16="http://schemas.microsoft.com/office/drawing/2014/main" id="{802EAB22-63DE-CBA1-726C-CD89E17AD94D}"/>
+              </a:ext>
+            </a:extLst>
+          </p:cNvPr>
+          <p:cNvSpPr>
+            <a:spLocks noGrp="1"/>
+          </p:cNvSpPr>
+          <p:nvPr>
+            <p:ph idx="1"/>
+          </p:nvPr>
+        </p:nvSpPr>
+        <p:spPr>
+          <a:xfrm>
+            <a:off x="0" y="1563638"/>
+            <a:ext cx="9144000" cy="1803647"/>
+          </a:xfrm>
+        </p:spPr>
+        <p:txBody>
+          <a:bodyPr anchor="ctr">
             <a:normAutofit/>
           </a:bodyPr>
           <a:lstStyle/>
           <a:p>
-            <a:r>
-              <a:rPr lang="zh-TW" altLang="en-US" sz="4000" b="1" dirty="0">
+            <a:pPr algn="ctr">
+              <a:buNone/>
+            </a:pPr>
+            <a:r>
+              <a:rPr lang="zh-TW" altLang="en-US" sz="4800" b="1" dirty="0">
                 <a:solidFill>
                   <a:srgbClr val="660033"/>
                 </a:solidFill>
                 <a:latin typeface="微軟正黑體" pitchFamily="34" charset="-120"/>
                 <a:ea typeface="微軟正黑體" pitchFamily="34" charset="-120"/>
               </a:rPr>
-              <a:t>恩典的記號</a:t>
-            </a:r>
-            <a:endParaRPr lang="zh-TW" altLang="en-US" sz="4000" b="1" dirty="0">
-              <a:solidFill>
-                <a:srgbClr val="660033"/>
-              </a:solidFill>
-              <a:latin typeface="微軟正黑體" pitchFamily="34" charset="-120"/>
-              <a:ea typeface="微軟正黑體" pitchFamily="34" charset="-120"/>
-            </a:endParaRPr>
-          </a:p>
-        </p:txBody>
-      </p:sp>
-      <p:sp>
-        <p:nvSpPr>
-          <p:cNvPr id="5" name="內容版面配置區 4"/>
-          <p:cNvSpPr>
-            <a:spLocks noGrp="1"/>
-          </p:cNvSpPr>
-          <p:nvPr>
-            <p:ph idx="1"/>
-          </p:nvPr>
-        </p:nvSpPr>
-        <p:spPr>
-          <a:xfrm>
-            <a:off x="0" y="1200151"/>
-            <a:ext cx="9144000" cy="3394472"/>
-          </a:xfrm>
-        </p:spPr>
-        <p:txBody>
-          <a:bodyPr>
-            <a:noAutofit/>
-          </a:bodyPr>
-          <a:lstStyle/>
-          <a:p>
-            <a:pPr algn="ctr">
-              <a:buNone/>
-            </a:pPr>
-            <a:r>
-              <a:rPr lang="zh-TW" altLang="en-US" sz="4800" b="1" dirty="0">
-                <a:solidFill>
-                  <a:srgbClr val="660033"/>
-                </a:solidFill>
-                <a:latin typeface="微軟正黑體" pitchFamily="34" charset="-120"/>
-                <a:ea typeface="微軟正黑體" pitchFamily="34" charset="-120"/>
-              </a:rPr>
-              <a:t>當我呼求 耶穌聽見我的禱告</a:t>
-            </a:r>
-          </a:p>
-          <a:p>
-            <a:pPr algn="ctr">
-              <a:buNone/>
-            </a:pPr>
-            <a:r>
-              <a:rPr lang="zh-TW" altLang="en-US" sz="4800" b="1" dirty="0">
-                <a:solidFill>
-                  <a:srgbClr val="660033"/>
-                </a:solidFill>
-                <a:latin typeface="微軟正黑體" pitchFamily="34" charset="-120"/>
-                <a:ea typeface="微軟正黑體" pitchFamily="34" charset="-120"/>
-              </a:rPr>
-              <a:t>千萬人中 祂竟關心我的需要</a:t>
+              <a:t>夜空的星星</a:t>
             </a:r>
             <a:endParaRPr lang="en-US" altLang="zh-TW" sz="4800" b="1" dirty="0">
               <a:solidFill>
@@ -3816,27 +4046,85 @@
                 <a:latin typeface="微軟正黑體" pitchFamily="34" charset="-120"/>
                 <a:ea typeface="微軟正黑體" pitchFamily="34" charset="-120"/>
               </a:rPr>
-              <a:t>走過的路 有歡笑有淚水</a:t>
-            </a:r>
-          </a:p>
-          <a:p>
-            <a:pPr algn="ctr">
-              <a:buNone/>
-            </a:pPr>
-            <a:r>
-              <a:rPr lang="zh-TW" altLang="en-US" sz="4800" b="1" dirty="0">
-                <a:solidFill>
-                  <a:srgbClr val="660033"/>
-                </a:solidFill>
-                <a:latin typeface="微軟正黑體" pitchFamily="34" charset="-120"/>
-                <a:ea typeface="微軟正黑體" pitchFamily="34" charset="-120"/>
-              </a:rPr>
-              <a:t>都留下 主恩典的記號</a:t>
-            </a:r>
+              <a:t>彷彿在對著我微微笑</a:t>
+            </a:r>
+          </a:p>
+        </p:txBody>
+      </p:sp>
+      <p:sp>
+        <p:nvSpPr>
+          <p:cNvPr id="3" name="TextBox 2">
+            <a:extLst>
+              <a:ext uri="{FF2B5EF4-FFF2-40B4-BE49-F238E27FC236}">
+                <a16:creationId xmlns:a16="http://schemas.microsoft.com/office/drawing/2014/main" id="{30C80A00-85A1-15DF-C762-E6455BB5F8C0}"/>
+              </a:ext>
+            </a:extLst>
+          </p:cNvPr>
+          <p:cNvSpPr txBox="1"/>
+          <p:nvPr/>
+        </p:nvSpPr>
+        <p:spPr>
+          <a:xfrm>
+            <a:off x="0" y="3867894"/>
+            <a:ext cx="9144000" cy="461665"/>
+          </a:xfrm>
+          <a:prstGeom prst="rect">
+            <a:avLst/>
+          </a:prstGeom>
+          <a:noFill/>
+        </p:spPr>
+        <p:txBody>
+          <a:bodyPr wrap="square" rtlCol="0">
+            <a:spAutoFit/>
+          </a:bodyPr>
+          <a:lstStyle/>
+          <a:p>
+            <a:pPr algn="ctr"/>
+            <a:r>
+              <a:rPr lang="en-US" sz="2400" b="1" dirty="0">
+                <a:solidFill>
+                  <a:srgbClr val="660033"/>
+                </a:solidFill>
+                <a:latin typeface="Microsoft JhengHei" panose="020B0604030504040204" pitchFamily="34" charset="-120"/>
+                <a:ea typeface="Microsoft JhengHei" panose="020B0604030504040204" pitchFamily="34" charset="-120"/>
+              </a:rPr>
+              <a:t>( </a:t>
+            </a:r>
+            <a:r>
+              <a:rPr lang="zh-CN" altLang="en-US" sz="2400" b="1" dirty="0">
+                <a:solidFill>
+                  <a:srgbClr val="660033"/>
+                </a:solidFill>
+                <a:latin typeface="Microsoft JhengHei" panose="020B0604030504040204" pitchFamily="34" charset="-120"/>
+                <a:ea typeface="Microsoft JhengHei" panose="020B0604030504040204" pitchFamily="34" charset="-120"/>
+              </a:rPr>
+              <a:t>正歌</a:t>
+            </a:r>
+            <a:r>
+              <a:rPr lang="en-US" sz="2400" b="1" dirty="0">
+                <a:solidFill>
+                  <a:srgbClr val="660033"/>
+                </a:solidFill>
+                <a:latin typeface="Microsoft JhengHei" panose="020B0604030504040204" pitchFamily="34" charset="-120"/>
+                <a:ea typeface="Microsoft JhengHei" panose="020B0604030504040204" pitchFamily="34" charset="-120"/>
+              </a:rPr>
+              <a:t> )</a:t>
+            </a:r>
+            <a:endParaRPr lang="vi-VN" sz="2400" b="1" dirty="0">
+              <a:solidFill>
+                <a:srgbClr val="660033"/>
+              </a:solidFill>
+              <a:ea typeface="Microsoft JhengHei" panose="020B0604030504040204" pitchFamily="34" charset="-120"/>
+            </a:endParaRPr>
           </a:p>
         </p:txBody>
       </p:sp>
     </p:spTree>
+    <p:extLst>
+      <p:ext uri="{BB962C8B-B14F-4D97-AF65-F5344CB8AC3E}">
+        <p14:creationId xmlns:p14="http://schemas.microsoft.com/office/powerpoint/2010/main" val="2982284420"/>
+      </p:ext>
+    </p:extLst>
   </p:cSld>
   <p:clrMapOvr>
     <a:masterClrMapping/>
@@ -3849,7 +4137,13 @@
   <p:cSld>
     <p:spTree>
       <p:nvGrpSpPr>
-        <p:cNvPr id="1" name=""/>
+        <p:cNvPr id="1" name="">
+          <a:extLst>
+            <a:ext uri="{FF2B5EF4-FFF2-40B4-BE49-F238E27FC236}">
+              <a16:creationId xmlns:a16="http://schemas.microsoft.com/office/drawing/2014/main" id="{12F2A033-AB21-63BF-A7DE-76D888555216}"/>
+            </a:ext>
+          </a:extLst>
+        </p:cNvPr>
         <p:cNvGrpSpPr/>
         <p:nvPr/>
       </p:nvGrpSpPr>
@@ -3863,90 +4157,44 @@
       </p:grpSpPr>
       <p:sp>
         <p:nvSpPr>
-          <p:cNvPr id="4" name="標題 3"/>
-          <p:cNvSpPr>
-            <a:spLocks noGrp="1"/>
-          </p:cNvSpPr>
-          <p:nvPr>
-            <p:ph type="title"/>
-          </p:nvPr>
-        </p:nvSpPr>
-        <p:spPr/>
-        <p:txBody>
-          <a:bodyPr>
+          <p:cNvPr id="5" name="內容版面配置區 4">
+            <a:extLst>
+              <a:ext uri="{FF2B5EF4-FFF2-40B4-BE49-F238E27FC236}">
+                <a16:creationId xmlns:a16="http://schemas.microsoft.com/office/drawing/2014/main" id="{02AEF957-A1C7-4233-BCE7-823373BB4211}"/>
+              </a:ext>
+            </a:extLst>
+          </p:cNvPr>
+          <p:cNvSpPr>
+            <a:spLocks noGrp="1"/>
+          </p:cNvSpPr>
+          <p:nvPr>
+            <p:ph idx="1"/>
+          </p:nvPr>
+        </p:nvSpPr>
+        <p:spPr>
+          <a:xfrm>
+            <a:off x="0" y="1563638"/>
+            <a:ext cx="9144000" cy="1803647"/>
+          </a:xfrm>
+        </p:spPr>
+        <p:txBody>
+          <a:bodyPr anchor="ctr">
             <a:normAutofit/>
           </a:bodyPr>
           <a:lstStyle/>
           <a:p>
-            <a:r>
-              <a:rPr lang="zh-TW" altLang="en-US" sz="4000" b="1" dirty="0">
+            <a:pPr algn="ctr">
+              <a:buNone/>
+            </a:pPr>
+            <a:r>
+              <a:rPr lang="zh-TW" altLang="en-US" sz="4800" b="1" dirty="0">
                 <a:solidFill>
                   <a:srgbClr val="660033"/>
                 </a:solidFill>
                 <a:latin typeface="微軟正黑體" pitchFamily="34" charset="-120"/>
                 <a:ea typeface="微軟正黑體" pitchFamily="34" charset="-120"/>
               </a:rPr>
-              <a:t>恩典的記號</a:t>
-            </a:r>
-            <a:endParaRPr lang="zh-TW" altLang="en-US" sz="4000" b="1" dirty="0">
-              <a:solidFill>
-                <a:srgbClr val="660033"/>
-              </a:solidFill>
-              <a:latin typeface="微軟正黑體" pitchFamily="34" charset="-120"/>
-              <a:ea typeface="微軟正黑體" pitchFamily="34" charset="-120"/>
-            </a:endParaRPr>
-          </a:p>
-        </p:txBody>
-      </p:sp>
-      <p:sp>
-        <p:nvSpPr>
-          <p:cNvPr id="5" name="內容版面配置區 4"/>
-          <p:cNvSpPr>
-            <a:spLocks noGrp="1"/>
-          </p:cNvSpPr>
-          <p:nvPr>
-            <p:ph idx="1"/>
-          </p:nvPr>
-        </p:nvSpPr>
-        <p:spPr>
-          <a:xfrm>
-            <a:off x="0" y="1200151"/>
-            <a:ext cx="9144000" cy="3394472"/>
-          </a:xfrm>
-        </p:spPr>
-        <p:txBody>
-          <a:bodyPr>
-            <a:noAutofit/>
-          </a:bodyPr>
-          <a:lstStyle/>
-          <a:p>
-            <a:pPr algn="ctr">
-              <a:buNone/>
-            </a:pPr>
-            <a:r>
-              <a:rPr lang="zh-TW" altLang="en-US" sz="4800" b="1" dirty="0">
-                <a:solidFill>
-                  <a:srgbClr val="660033"/>
-                </a:solidFill>
-                <a:latin typeface="微軟正黑體" pitchFamily="34" charset="-120"/>
-                <a:ea typeface="微軟正黑體" pitchFamily="34" charset="-120"/>
-              </a:rPr>
-              <a:t>在風雨中 耶穌將我緊緊擁抱</a:t>
-            </a:r>
-          </a:p>
-          <a:p>
-            <a:pPr algn="ctr">
-              <a:buNone/>
-            </a:pPr>
-            <a:r>
-              <a:rPr lang="zh-TW" altLang="en-US" sz="4800" b="1" dirty="0">
-                <a:solidFill>
-                  <a:srgbClr val="660033"/>
-                </a:solidFill>
-                <a:latin typeface="微軟正黑體" pitchFamily="34" charset="-120"/>
-                <a:ea typeface="微軟正黑體" pitchFamily="34" charset="-120"/>
-              </a:rPr>
-              <a:t>我深知道 祂是我永遠的依靠</a:t>
+              <a:t>輕聲告訴我</a:t>
             </a:r>
             <a:endParaRPr lang="en-US" altLang="zh-TW" sz="4800" b="1" dirty="0">
               <a:solidFill>
@@ -3968,9 +4216,149 @@
                 <a:latin typeface="微軟正黑體" pitchFamily="34" charset="-120"/>
                 <a:ea typeface="微軟正黑體" pitchFamily="34" charset="-120"/>
               </a:rPr>
-              <a:t>走過的路 有歡笑有淚水</a:t>
-            </a:r>
-          </a:p>
+              <a:t>一切祂都看見了</a:t>
+            </a:r>
+            <a:endParaRPr lang="en-US" altLang="zh-TW" sz="4800" b="1" dirty="0">
+              <a:solidFill>
+                <a:srgbClr val="660033"/>
+              </a:solidFill>
+              <a:latin typeface="微軟正黑體" pitchFamily="34" charset="-120"/>
+              <a:ea typeface="微軟正黑體" pitchFamily="34" charset="-120"/>
+            </a:endParaRPr>
+          </a:p>
+        </p:txBody>
+      </p:sp>
+      <p:sp>
+        <p:nvSpPr>
+          <p:cNvPr id="3" name="TextBox 2">
+            <a:extLst>
+              <a:ext uri="{FF2B5EF4-FFF2-40B4-BE49-F238E27FC236}">
+                <a16:creationId xmlns:a16="http://schemas.microsoft.com/office/drawing/2014/main" id="{80DAC053-1AFC-0C6A-66E5-31E0E37C6B3F}"/>
+              </a:ext>
+            </a:extLst>
+          </p:cNvPr>
+          <p:cNvSpPr txBox="1"/>
+          <p:nvPr/>
+        </p:nvSpPr>
+        <p:spPr>
+          <a:xfrm>
+            <a:off x="0" y="3867894"/>
+            <a:ext cx="9144000" cy="461665"/>
+          </a:xfrm>
+          <a:prstGeom prst="rect">
+            <a:avLst/>
+          </a:prstGeom>
+          <a:noFill/>
+        </p:spPr>
+        <p:txBody>
+          <a:bodyPr wrap="square" rtlCol="0">
+            <a:spAutoFit/>
+          </a:bodyPr>
+          <a:lstStyle/>
+          <a:p>
+            <a:pPr algn="ctr"/>
+            <a:r>
+              <a:rPr lang="en-US" sz="2400" b="1" dirty="0">
+                <a:solidFill>
+                  <a:srgbClr val="660033"/>
+                </a:solidFill>
+                <a:latin typeface="Microsoft JhengHei" panose="020B0604030504040204" pitchFamily="34" charset="-120"/>
+                <a:ea typeface="Microsoft JhengHei" panose="020B0604030504040204" pitchFamily="34" charset="-120"/>
+              </a:rPr>
+              <a:t>( </a:t>
+            </a:r>
+            <a:r>
+              <a:rPr lang="zh-CN" altLang="en-US" sz="2400" b="1" dirty="0">
+                <a:solidFill>
+                  <a:srgbClr val="660033"/>
+                </a:solidFill>
+                <a:latin typeface="Microsoft JhengHei" panose="020B0604030504040204" pitchFamily="34" charset="-120"/>
+                <a:ea typeface="Microsoft JhengHei" panose="020B0604030504040204" pitchFamily="34" charset="-120"/>
+              </a:rPr>
+              <a:t>正歌</a:t>
+            </a:r>
+            <a:r>
+              <a:rPr lang="en-US" sz="2400" b="1" dirty="0">
+                <a:solidFill>
+                  <a:srgbClr val="660033"/>
+                </a:solidFill>
+                <a:latin typeface="Microsoft JhengHei" panose="020B0604030504040204" pitchFamily="34" charset="-120"/>
+                <a:ea typeface="Microsoft JhengHei" panose="020B0604030504040204" pitchFamily="34" charset="-120"/>
+              </a:rPr>
+              <a:t> )</a:t>
+            </a:r>
+            <a:endParaRPr lang="vi-VN" sz="2400" b="1" dirty="0">
+              <a:solidFill>
+                <a:srgbClr val="660033"/>
+              </a:solidFill>
+              <a:ea typeface="Microsoft JhengHei" panose="020B0604030504040204" pitchFamily="34" charset="-120"/>
+            </a:endParaRPr>
+          </a:p>
+        </p:txBody>
+      </p:sp>
+    </p:spTree>
+    <p:extLst>
+      <p:ext uri="{BB962C8B-B14F-4D97-AF65-F5344CB8AC3E}">
+        <p14:creationId xmlns:p14="http://schemas.microsoft.com/office/powerpoint/2010/main" val="2782259323"/>
+      </p:ext>
+    </p:extLst>
+  </p:cSld>
+  <p:clrMapOvr>
+    <a:masterClrMapping/>
+  </p:clrMapOvr>
+</p:sld>
+</file>
+
+<file path=ppt/slides/slide7.xml><?xml version="1.0" encoding="utf-8"?>
+<p:sld xmlns:a="http://schemas.openxmlformats.org/drawingml/2006/main" xmlns:r="http://schemas.openxmlformats.org/officeDocument/2006/relationships" xmlns:p="http://schemas.openxmlformats.org/presentationml/2006/main">
+  <p:cSld>
+    <p:spTree>
+      <p:nvGrpSpPr>
+        <p:cNvPr id="1" name="">
+          <a:extLst>
+            <a:ext uri="{FF2B5EF4-FFF2-40B4-BE49-F238E27FC236}">
+              <a16:creationId xmlns:a16="http://schemas.microsoft.com/office/drawing/2014/main" id="{440E31C9-48F5-4DA4-A895-18551264343E}"/>
+            </a:ext>
+          </a:extLst>
+        </p:cNvPr>
+        <p:cNvGrpSpPr/>
+        <p:nvPr/>
+      </p:nvGrpSpPr>
+      <p:grpSpPr>
+        <a:xfrm>
+          <a:off x="0" y="0"/>
+          <a:ext cx="0" cy="0"/>
+          <a:chOff x="0" y="0"/>
+          <a:chExt cx="0" cy="0"/>
+        </a:xfrm>
+      </p:grpSpPr>
+      <p:sp>
+        <p:nvSpPr>
+          <p:cNvPr id="5" name="內容版面配置區 4">
+            <a:extLst>
+              <a:ext uri="{FF2B5EF4-FFF2-40B4-BE49-F238E27FC236}">
+                <a16:creationId xmlns:a16="http://schemas.microsoft.com/office/drawing/2014/main" id="{56BEB7D3-2798-86DC-2B72-2D1D6728A1DF}"/>
+              </a:ext>
+            </a:extLst>
+          </p:cNvPr>
+          <p:cNvSpPr>
+            <a:spLocks noGrp="1"/>
+          </p:cNvSpPr>
+          <p:nvPr>
+            <p:ph idx="1"/>
+          </p:nvPr>
+        </p:nvSpPr>
+        <p:spPr>
+          <a:xfrm>
+            <a:off x="0" y="1563638"/>
+            <a:ext cx="9144000" cy="1803647"/>
+          </a:xfrm>
+        </p:spPr>
+        <p:txBody>
+          <a:bodyPr anchor="ctr">
+            <a:normAutofit/>
+          </a:bodyPr>
+          <a:lstStyle/>
           <a:p>
             <a:pPr algn="ctr">
               <a:buNone/>
@@ -3983,12 +4371,433 @@
                 <a:latin typeface="微軟正黑體" pitchFamily="34" charset="-120"/>
                 <a:ea typeface="微軟正黑體" pitchFamily="34" charset="-120"/>
               </a:rPr>
-              <a:t>將成為 主恩典的記號 </a:t>
-            </a:r>
+              <a:t>我所有掙扎  所有軟弱和跌倒</a:t>
+            </a:r>
+          </a:p>
+          <a:p>
+            <a:pPr algn="ctr">
+              <a:buNone/>
+            </a:pPr>
+            <a:r>
+              <a:rPr lang="zh-TW" altLang="en-US" sz="4800" b="1" dirty="0">
+                <a:solidFill>
+                  <a:srgbClr val="660033"/>
+                </a:solidFill>
+                <a:latin typeface="微軟正黑體" pitchFamily="34" charset="-120"/>
+                <a:ea typeface="微軟正黑體" pitchFamily="34" charset="-120"/>
+              </a:rPr>
+              <a:t>將成為主恩典的記號</a:t>
+            </a:r>
+          </a:p>
+        </p:txBody>
+      </p:sp>
+      <p:sp>
+        <p:nvSpPr>
+          <p:cNvPr id="3" name="TextBox 2">
+            <a:extLst>
+              <a:ext uri="{FF2B5EF4-FFF2-40B4-BE49-F238E27FC236}">
+                <a16:creationId xmlns:a16="http://schemas.microsoft.com/office/drawing/2014/main" id="{FCA7B4A1-9B0A-4C4D-254F-A67D9A7BEAE5}"/>
+              </a:ext>
+            </a:extLst>
+          </p:cNvPr>
+          <p:cNvSpPr txBox="1"/>
+          <p:nvPr/>
+        </p:nvSpPr>
+        <p:spPr>
+          <a:xfrm>
+            <a:off x="0" y="3867894"/>
+            <a:ext cx="9144000" cy="461665"/>
+          </a:xfrm>
+          <a:prstGeom prst="rect">
+            <a:avLst/>
+          </a:prstGeom>
+          <a:noFill/>
+        </p:spPr>
+        <p:txBody>
+          <a:bodyPr wrap="square" rtlCol="0">
+            <a:spAutoFit/>
+          </a:bodyPr>
+          <a:lstStyle/>
+          <a:p>
+            <a:pPr algn="ctr"/>
+            <a:r>
+              <a:rPr lang="en-US" sz="2400" b="1" dirty="0">
+                <a:solidFill>
+                  <a:srgbClr val="660033"/>
+                </a:solidFill>
+                <a:latin typeface="Microsoft JhengHei" panose="020B0604030504040204" pitchFamily="34" charset="-120"/>
+                <a:ea typeface="Microsoft JhengHei" panose="020B0604030504040204" pitchFamily="34" charset="-120"/>
+              </a:rPr>
+              <a:t>( </a:t>
+            </a:r>
+            <a:r>
+              <a:rPr lang="zh-CN" altLang="en-US" sz="2400" b="1" dirty="0">
+                <a:solidFill>
+                  <a:srgbClr val="660033"/>
+                </a:solidFill>
+                <a:latin typeface="Microsoft JhengHei" panose="020B0604030504040204" pitchFamily="34" charset="-120"/>
+                <a:ea typeface="Microsoft JhengHei" panose="020B0604030504040204" pitchFamily="34" charset="-120"/>
+              </a:rPr>
+              <a:t>正歌</a:t>
+            </a:r>
+            <a:r>
+              <a:rPr lang="en-US" sz="2400" b="1" dirty="0">
+                <a:solidFill>
+                  <a:srgbClr val="660033"/>
+                </a:solidFill>
+                <a:latin typeface="Microsoft JhengHei" panose="020B0604030504040204" pitchFamily="34" charset="-120"/>
+                <a:ea typeface="Microsoft JhengHei" panose="020B0604030504040204" pitchFamily="34" charset="-120"/>
+              </a:rPr>
+              <a:t> )</a:t>
+            </a:r>
+            <a:endParaRPr lang="vi-VN" sz="2400" b="1" dirty="0">
+              <a:solidFill>
+                <a:srgbClr val="660033"/>
+              </a:solidFill>
+              <a:ea typeface="Microsoft JhengHei" panose="020B0604030504040204" pitchFamily="34" charset="-120"/>
+            </a:endParaRPr>
           </a:p>
         </p:txBody>
       </p:sp>
     </p:spTree>
+    <p:extLst>
+      <p:ext uri="{BB962C8B-B14F-4D97-AF65-F5344CB8AC3E}">
+        <p14:creationId xmlns:p14="http://schemas.microsoft.com/office/powerpoint/2010/main" val="715812021"/>
+      </p:ext>
+    </p:extLst>
+  </p:cSld>
+  <p:clrMapOvr>
+    <a:masterClrMapping/>
+  </p:clrMapOvr>
+</p:sld>
+</file>
+
+<file path=ppt/slides/slide8.xml><?xml version="1.0" encoding="utf-8"?>
+<p:sld xmlns:a="http://schemas.openxmlformats.org/drawingml/2006/main" xmlns:r="http://schemas.openxmlformats.org/officeDocument/2006/relationships" xmlns:p="http://schemas.openxmlformats.org/presentationml/2006/main">
+  <p:cSld>
+    <p:spTree>
+      <p:nvGrpSpPr>
+        <p:cNvPr id="1" name="">
+          <a:extLst>
+            <a:ext uri="{FF2B5EF4-FFF2-40B4-BE49-F238E27FC236}">
+              <a16:creationId xmlns:a16="http://schemas.microsoft.com/office/drawing/2014/main" id="{C492431F-FB2B-9C25-5B83-F8B742C7029A}"/>
+            </a:ext>
+          </a:extLst>
+        </p:cNvPr>
+        <p:cNvGrpSpPr/>
+        <p:nvPr/>
+      </p:nvGrpSpPr>
+      <p:grpSpPr>
+        <a:xfrm>
+          <a:off x="0" y="0"/>
+          <a:ext cx="0" cy="0"/>
+          <a:chOff x="0" y="0"/>
+          <a:chExt cx="0" cy="0"/>
+        </a:xfrm>
+      </p:grpSpPr>
+      <p:sp>
+        <p:nvSpPr>
+          <p:cNvPr id="5" name="內容版面配置區 4">
+            <a:extLst>
+              <a:ext uri="{FF2B5EF4-FFF2-40B4-BE49-F238E27FC236}">
+                <a16:creationId xmlns:a16="http://schemas.microsoft.com/office/drawing/2014/main" id="{4B2FDEFA-FF6A-0975-ABC5-C89F4A066FD6}"/>
+              </a:ext>
+            </a:extLst>
+          </p:cNvPr>
+          <p:cNvSpPr>
+            <a:spLocks noGrp="1"/>
+          </p:cNvSpPr>
+          <p:nvPr>
+            <p:ph idx="1"/>
+          </p:nvPr>
+        </p:nvSpPr>
+        <p:spPr>
+          <a:xfrm>
+            <a:off x="0" y="1563638"/>
+            <a:ext cx="9144000" cy="1803647"/>
+          </a:xfrm>
+        </p:spPr>
+        <p:txBody>
+          <a:bodyPr anchor="ctr">
+            <a:normAutofit/>
+          </a:bodyPr>
+          <a:lstStyle/>
+          <a:p>
+            <a:pPr algn="ctr">
+              <a:buNone/>
+            </a:pPr>
+            <a:r>
+              <a:rPr lang="zh-TW" altLang="en-US" sz="4800" b="1" dirty="0">
+                <a:solidFill>
+                  <a:srgbClr val="660033"/>
+                </a:solidFill>
+                <a:latin typeface="微軟正黑體" pitchFamily="34" charset="-120"/>
+                <a:ea typeface="微軟正黑體" pitchFamily="34" charset="-120"/>
+              </a:rPr>
+              <a:t>當我呼求  耶穌聽見我的禱告</a:t>
+            </a:r>
+          </a:p>
+          <a:p>
+            <a:pPr algn="ctr">
+              <a:buNone/>
+            </a:pPr>
+            <a:r>
+              <a:rPr lang="zh-TW" altLang="en-US" sz="4800" b="1" dirty="0">
+                <a:solidFill>
+                  <a:srgbClr val="660033"/>
+                </a:solidFill>
+                <a:latin typeface="微軟正黑體" pitchFamily="34" charset="-120"/>
+                <a:ea typeface="微軟正黑體" pitchFamily="34" charset="-120"/>
+              </a:rPr>
+              <a:t>千萬人中  祂竟關心我的需要</a:t>
+            </a:r>
+            <a:endParaRPr lang="en-US" altLang="zh-TW" sz="4800" b="1" dirty="0">
+              <a:solidFill>
+                <a:srgbClr val="660033"/>
+              </a:solidFill>
+              <a:latin typeface="微軟正黑體" pitchFamily="34" charset="-120"/>
+              <a:ea typeface="微軟正黑體" pitchFamily="34" charset="-120"/>
+            </a:endParaRPr>
+          </a:p>
+        </p:txBody>
+      </p:sp>
+      <p:sp>
+        <p:nvSpPr>
+          <p:cNvPr id="3" name="TextBox 2">
+            <a:extLst>
+              <a:ext uri="{FF2B5EF4-FFF2-40B4-BE49-F238E27FC236}">
+                <a16:creationId xmlns:a16="http://schemas.microsoft.com/office/drawing/2014/main" id="{74945BFD-1A2F-5920-1DA5-11D99E060B42}"/>
+              </a:ext>
+            </a:extLst>
+          </p:cNvPr>
+          <p:cNvSpPr txBox="1"/>
+          <p:nvPr/>
+        </p:nvSpPr>
+        <p:spPr>
+          <a:xfrm>
+            <a:off x="0" y="3867894"/>
+            <a:ext cx="9144000" cy="461665"/>
+          </a:xfrm>
+          <a:prstGeom prst="rect">
+            <a:avLst/>
+          </a:prstGeom>
+          <a:noFill/>
+        </p:spPr>
+        <p:txBody>
+          <a:bodyPr wrap="square" rtlCol="0">
+            <a:spAutoFit/>
+          </a:bodyPr>
+          <a:lstStyle/>
+          <a:p>
+            <a:pPr algn="ctr"/>
+            <a:r>
+              <a:rPr lang="en-US" sz="2400" b="1" dirty="0">
+                <a:solidFill>
+                  <a:srgbClr val="660033"/>
+                </a:solidFill>
+                <a:latin typeface="Microsoft JhengHei" panose="020B0604030504040204" pitchFamily="34" charset="-120"/>
+                <a:ea typeface="Microsoft JhengHei" panose="020B0604030504040204" pitchFamily="34" charset="-120"/>
+              </a:rPr>
+              <a:t>( </a:t>
+            </a:r>
+            <a:r>
+              <a:rPr lang="zh-CN" altLang="en-US" sz="2400" b="1" dirty="0">
+                <a:solidFill>
+                  <a:srgbClr val="660033"/>
+                </a:solidFill>
+                <a:latin typeface="Microsoft JhengHei" panose="020B0604030504040204" pitchFamily="34" charset="-120"/>
+                <a:ea typeface="Microsoft JhengHei" panose="020B0604030504040204" pitchFamily="34" charset="-120"/>
+              </a:rPr>
+              <a:t>副歌</a:t>
+            </a:r>
+            <a:r>
+              <a:rPr lang="en-US" sz="2400" b="1" dirty="0">
+                <a:solidFill>
+                  <a:srgbClr val="660033"/>
+                </a:solidFill>
+                <a:latin typeface="Microsoft JhengHei" panose="020B0604030504040204" pitchFamily="34" charset="-120"/>
+                <a:ea typeface="Microsoft JhengHei" panose="020B0604030504040204" pitchFamily="34" charset="-120"/>
+              </a:rPr>
+              <a:t> )</a:t>
+            </a:r>
+            <a:endParaRPr lang="vi-VN" sz="2400" b="1" dirty="0">
+              <a:solidFill>
+                <a:srgbClr val="660033"/>
+              </a:solidFill>
+              <a:ea typeface="Microsoft JhengHei" panose="020B0604030504040204" pitchFamily="34" charset="-120"/>
+            </a:endParaRPr>
+          </a:p>
+        </p:txBody>
+      </p:sp>
+    </p:spTree>
+    <p:extLst>
+      <p:ext uri="{BB962C8B-B14F-4D97-AF65-F5344CB8AC3E}">
+        <p14:creationId xmlns:p14="http://schemas.microsoft.com/office/powerpoint/2010/main" val="125835481"/>
+      </p:ext>
+    </p:extLst>
+  </p:cSld>
+  <p:clrMapOvr>
+    <a:masterClrMapping/>
+  </p:clrMapOvr>
+</p:sld>
+</file>
+
+<file path=ppt/slides/slide9.xml><?xml version="1.0" encoding="utf-8"?>
+<p:sld xmlns:a="http://schemas.openxmlformats.org/drawingml/2006/main" xmlns:r="http://schemas.openxmlformats.org/officeDocument/2006/relationships" xmlns:p="http://schemas.openxmlformats.org/presentationml/2006/main">
+  <p:cSld>
+    <p:spTree>
+      <p:nvGrpSpPr>
+        <p:cNvPr id="1" name="">
+          <a:extLst>
+            <a:ext uri="{FF2B5EF4-FFF2-40B4-BE49-F238E27FC236}">
+              <a16:creationId xmlns:a16="http://schemas.microsoft.com/office/drawing/2014/main" id="{EC1A1CB2-949A-97B5-31A7-46D805B38091}"/>
+            </a:ext>
+          </a:extLst>
+        </p:cNvPr>
+        <p:cNvGrpSpPr/>
+        <p:nvPr/>
+      </p:nvGrpSpPr>
+      <p:grpSpPr>
+        <a:xfrm>
+          <a:off x="0" y="0"/>
+          <a:ext cx="0" cy="0"/>
+          <a:chOff x="0" y="0"/>
+          <a:chExt cx="0" cy="0"/>
+        </a:xfrm>
+      </p:grpSpPr>
+      <p:sp>
+        <p:nvSpPr>
+          <p:cNvPr id="5" name="內容版面配置區 4">
+            <a:extLst>
+              <a:ext uri="{FF2B5EF4-FFF2-40B4-BE49-F238E27FC236}">
+                <a16:creationId xmlns:a16="http://schemas.microsoft.com/office/drawing/2014/main" id="{5E7018F7-FD34-D5BD-4FC4-8B9417E4C433}"/>
+              </a:ext>
+            </a:extLst>
+          </p:cNvPr>
+          <p:cNvSpPr>
+            <a:spLocks noGrp="1"/>
+          </p:cNvSpPr>
+          <p:nvPr>
+            <p:ph idx="1"/>
+          </p:nvPr>
+        </p:nvSpPr>
+        <p:spPr>
+          <a:xfrm>
+            <a:off x="0" y="1563638"/>
+            <a:ext cx="9144000" cy="1803647"/>
+          </a:xfrm>
+        </p:spPr>
+        <p:txBody>
+          <a:bodyPr anchor="ctr">
+            <a:normAutofit/>
+          </a:bodyPr>
+          <a:lstStyle/>
+          <a:p>
+            <a:pPr algn="ctr">
+              <a:buNone/>
+            </a:pPr>
+            <a:r>
+              <a:rPr lang="zh-TW" altLang="en-US" sz="4800" b="1" dirty="0">
+                <a:solidFill>
+                  <a:srgbClr val="660033"/>
+                </a:solidFill>
+                <a:latin typeface="微軟正黑體" pitchFamily="34" charset="-120"/>
+                <a:ea typeface="微軟正黑體" pitchFamily="34" charset="-120"/>
+              </a:rPr>
+              <a:t>走過的路  有歡笑有淚水</a:t>
+            </a:r>
+          </a:p>
+          <a:p>
+            <a:pPr algn="ctr">
+              <a:buNone/>
+            </a:pPr>
+            <a:r>
+              <a:rPr lang="zh-TW" altLang="en-US" sz="4800" b="1" dirty="0">
+                <a:solidFill>
+                  <a:srgbClr val="660033"/>
+                </a:solidFill>
+                <a:latin typeface="微軟正黑體" pitchFamily="34" charset="-120"/>
+                <a:ea typeface="微軟正黑體" pitchFamily="34" charset="-120"/>
+              </a:rPr>
+              <a:t>都留下主恩典的記號</a:t>
+            </a:r>
+          </a:p>
+        </p:txBody>
+      </p:sp>
+      <p:sp>
+        <p:nvSpPr>
+          <p:cNvPr id="3" name="TextBox 2">
+            <a:extLst>
+              <a:ext uri="{FF2B5EF4-FFF2-40B4-BE49-F238E27FC236}">
+                <a16:creationId xmlns:a16="http://schemas.microsoft.com/office/drawing/2014/main" id="{D7238E23-A147-9435-00A6-BD35196207F0}"/>
+              </a:ext>
+            </a:extLst>
+          </p:cNvPr>
+          <p:cNvSpPr txBox="1"/>
+          <p:nvPr/>
+        </p:nvSpPr>
+        <p:spPr>
+          <a:xfrm>
+            <a:off x="0" y="3867894"/>
+            <a:ext cx="9144000" cy="461665"/>
+          </a:xfrm>
+          <a:prstGeom prst="rect">
+            <a:avLst/>
+          </a:prstGeom>
+          <a:noFill/>
+        </p:spPr>
+        <p:txBody>
+          <a:bodyPr wrap="square" rtlCol="0">
+            <a:spAutoFit/>
+          </a:bodyPr>
+          <a:lstStyle/>
+          <a:p>
+            <a:pPr algn="ctr"/>
+            <a:r>
+              <a:rPr lang="en-US" sz="2400" b="1" dirty="0">
+                <a:solidFill>
+                  <a:srgbClr val="660033"/>
+                </a:solidFill>
+                <a:latin typeface="Microsoft JhengHei" panose="020B0604030504040204" pitchFamily="34" charset="-120"/>
+                <a:ea typeface="Microsoft JhengHei" panose="020B0604030504040204" pitchFamily="34" charset="-120"/>
+              </a:rPr>
+              <a:t>( </a:t>
+            </a:r>
+            <a:r>
+              <a:rPr lang="zh-CN" altLang="en-US" sz="2400" b="1" dirty="0">
+                <a:solidFill>
+                  <a:srgbClr val="660033"/>
+                </a:solidFill>
+                <a:latin typeface="Microsoft JhengHei" panose="020B0604030504040204" pitchFamily="34" charset="-120"/>
+                <a:ea typeface="Microsoft JhengHei" panose="020B0604030504040204" pitchFamily="34" charset="-120"/>
+              </a:rPr>
+              <a:t>副歌</a:t>
+            </a:r>
+            <a:r>
+              <a:rPr lang="en-US" sz="2400" b="1" dirty="0">
+                <a:solidFill>
+                  <a:srgbClr val="660033"/>
+                </a:solidFill>
+                <a:latin typeface="Microsoft JhengHei" panose="020B0604030504040204" pitchFamily="34" charset="-120"/>
+                <a:ea typeface="Microsoft JhengHei" panose="020B0604030504040204" pitchFamily="34" charset="-120"/>
+              </a:rPr>
+              <a:t> )</a:t>
+            </a:r>
+            <a:endParaRPr lang="vi-VN" sz="2400" b="1" dirty="0">
+              <a:solidFill>
+                <a:srgbClr val="660033"/>
+              </a:solidFill>
+              <a:ea typeface="Microsoft JhengHei" panose="020B0604030504040204" pitchFamily="34" charset="-120"/>
+            </a:endParaRPr>
+          </a:p>
+        </p:txBody>
+      </p:sp>
+    </p:spTree>
+    <p:extLst>
+      <p:ext uri="{BB962C8B-B14F-4D97-AF65-F5344CB8AC3E}">
+        <p14:creationId xmlns:p14="http://schemas.microsoft.com/office/powerpoint/2010/main" val="4261715772"/>
+      </p:ext>
+    </p:extLst>
   </p:cSld>
   <p:clrMapOvr>
     <a:masterClrMapping/>
